--- a/CSDS/A/CSDS-A-A9/16.Final_PPT.pptx
+++ b/CSDS/A/CSDS-A-A9/16.Final_PPT.pptx
@@ -778,7 +778,7 @@
           <a:lstStyle/>
           <a:p>
             <a:r>
-              <a:t>Everything is synthetic and tiny by design; the findings describe the algorithm and the demonstrator, not an LLM.</a:t>
+              <a:t>Three synthetic data sources and two models. The findings describe the algorithm and the demonstrator at small scale; billion-parameter LLMs are outside the project's scope and hardware.</a:t>
             </a:r>
           </a:p>
         </p:txBody>
@@ -1192,7 +1192,7 @@
           <a:lstStyle/>
           <a:p>
             <a:r>
-              <a:t>The headline certificate result is an identity; the gold-standard comparison and the noise-free attack supply the real evidence.</a:t>
+              <a:t>The headline certificate result is an identity; the fresh-noise retrain comparison and the noise-free attack supply the real evidence, on three models. Automated checks (5 unit tests, 14 smoke checks, load, security probes, acceptance journeys) are on the performance and testing slide.</a:t>
             </a:r>
           </a:p>
         </p:txBody>
@@ -1278,7 +1278,7 @@
           <a:lstStyle/>
           <a:p>
             <a:r>
-              <a:t>There is no classifier here, so the equivalent of a confusion matrix is the per-client outcome table and the detected / not-detected matrix of tamper attacks.</a:t>
+              <a:t>There is no classifier here, so the equivalent of a confusion matrix is the before / after / fresh-retrain attack outcome (here for the neural study; the bigram per-client table is in the report) and the detected / not-detected matrix of tamper attacks.</a:t>
             </a:r>
           </a:p>
         </p:txBody>
@@ -1364,7 +1364,7 @@
           <a:lstStyle/>
           <a:p>
             <a:r>
-              <a:t>20 seeds x 5 clients per sigma. epsilon &lt; 1 needs sigma &gt; 4.85, where perplexity is 198-305.</a:t>
+              <a:t>Left: synthetic corpus, 100 sentences per client, C = median norm, 5 seeds per point. Right: neural study, 8 clients, 5 seeds. Product sweep (5 clients, 20 seeds x 5 clients per sigma): useful only at sigma &lt;= 0.1 (epsilon &gt;= 48); at sigma 3 perplexity is 145; epsilon &lt; 1 needs sigma &gt; 4.85, where perplexity is 198-305.</a:t>
             </a:r>
           </a:p>
         </p:txBody>
@@ -1532,7 +1532,7 @@
           <a:lstStyle/>
           <a:p>
             <a:r>
-              <a:t>Machine: Intel Core i5-12500, 15.7 GB RAM, no GPU. Latencies are single-client medians; proxy retraining is itself cheap, so these say nothing about LLM-scale cost.</a:t>
+              <a:t>Machine: Intel Core i5-12500, 15.7 GB RAM, no GPU. Latencies are single-client medians; proxy retraining is itself cheap, so the bigram numbers say nothing about larger models; the neural row is the measured cost for 7 adapters of 14,272 parameters.</a:t>
             </a:r>
           </a:p>
         </p:txBody>
@@ -2282,7 +2282,7 @@
           <a:lstStyle/>
           <a:p>
             <a:r>
-              <a:t>Abstract: problem, approach, headline measurements and the honest limits.</a:t>
+              <a:t>Abstract: problem, approach, headline measurements and findings. Everything is measured on synthetic data.</a:t>
             </a:r>
           </a:p>
         </p:txBody>
@@ -2540,7 +2540,7 @@
           <a:lstStyle/>
           <a:p>
             <a:r>
-              <a:t>The gap is the certified, auditable workflow; the prototype does not close the evidence gap because it uses a proxy model.</a:t>
+              <a:t>The gap is the certified, auditable workflow. The prototype implements it and measures it at small scale on synthetic data; billion-parameter LLMs are outside its scope.</a:t>
             </a:r>
           </a:p>
         </p:txBody>
@@ -4319,7 +4319,7 @@
               <a:buChar char="•"/>
             </a:pPr>
             <a:r>
-              <a:rPr lang="en-US" sz="1600" dirty="0">
+              <a:rPr lang="en-US" sz="1500" dirty="0">
                 <a:solidFill>
                   <a:srgbClr val="222222"/>
                 </a:solidFill>
@@ -4327,9 +4327,9 @@
                 <a:ea typeface="Calibri" pitchFamily="34" charset="-122"/>
                 <a:cs typeface="Calibri" pitchFamily="34" charset="-120"/>
               </a:rPr>
-              <a:t>Data: built-in synthetic corpus, 5 clients (Finance, Healthcare, Education, Retail, Travel) x 5 sentences = 25 records; 5 public evaluation sentences; 5 non-member sentences. No external dataset and no train/test split beyond these fixed sets.</a:t>
-            </a:r>
-            <a:endParaRPr lang="en-US" sz="1600" dirty="0"/>
+              <a:t>Data (all synthetic): the product's built-in corpus (5 clients x 5 sentences); a seeded 20-domain grammar corpus (200 train / 200 held-out sentences per client, 300 public); an 8-domain corpus for the neural study (150 train / 150 held-out per client).</a:t>
+            </a:r>
+            <a:endParaRPr lang="en-US" sz="1500" dirty="0"/>
           </a:p>
           <a:p>
             <a:pPr marL="342900" indent="-342900">
@@ -4340,7 +4340,7 @@
               <a:buChar char="•"/>
             </a:pPr>
             <a:r>
-              <a:rPr lang="en-US" sz="1600" dirty="0">
+              <a:rPr lang="en-US" sz="1500" dirty="0">
                 <a:solidFill>
                   <a:srgbClr val="222222"/>
                 </a:solidFill>
@@ -4348,9 +4348,9 @@
                 <a:ea typeface="Calibri" pitchFamily="34" charset="-122"/>
                 <a:cs typeface="Calibri" pitchFamily="34" charset="-120"/>
               </a:rPr>
-              <a:t>Model: character-bigram language model over a 33-symbol alphabet; 33 x 33 = 1,089 parameters; add-0.15 smoothing. It stands in for a LoRA-style adapter update.</a:t>
-            </a:r>
-            <a:endParaRPr lang="en-US" sz="1600" dirty="0"/>
+              <a:t>Models: character-bigram LM (33 x 33 = 1,089 parameters, add-0.15 smoothing); neural GRU (137,151 parameters, frozen) with rank-64 LoRA-style adapters (14,272 parameters per client).</a:t>
+            </a:r>
+            <a:endParaRPr lang="en-US" sz="1500" dirty="0"/>
           </a:p>
           <a:p>
             <a:pPr marL="342900" indent="-342900">
@@ -4361,7 +4361,7 @@
               <a:buChar char="•"/>
             </a:pPr>
             <a:r>
-              <a:rPr lang="en-US" sz="1600" dirty="0">
+              <a:rPr lang="en-US" sz="1500" dirty="0">
                 <a:solidFill>
                   <a:srgbClr val="222222"/>
                 </a:solidFill>
@@ -4369,9 +4369,9 @@
                 <a:ea typeface="Calibri" pitchFamily="34" charset="-122"/>
                 <a:cs typeface="Calibri" pitchFamily="34" charset="-120"/>
               </a:rPr>
-              <a:t>Clipping: C = 25; all five raw update norms (25.2-28.2) are clipped (scale 0.886-0.991).</a:t>
-            </a:r>
-            <a:endParaRPr lang="en-US" sz="1600" dirty="0"/>
+              <a:t>Clipping: the product's C = 25 clips all five raw norms (25.2-28.2); at 200 sentences per client raw norms are about 1,239 (C = 25 would scale them by 0.02), so the studies use C = median raw norm.</a:t>
+            </a:r>
+            <a:endParaRPr lang="en-US" sz="1500" dirty="0"/>
           </a:p>
           <a:p>
             <a:pPr marL="342900" indent="-342900">
@@ -4382,7 +4382,7 @@
               <a:buChar char="•"/>
             </a:pPr>
             <a:r>
-              <a:rPr lang="en-US" sz="1600" dirty="0">
+              <a:rPr lang="en-US" sz="1500" dirty="0">
                 <a:solidFill>
                   <a:srgbClr val="222222"/>
                 </a:solidFill>
@@ -4390,9 +4390,9 @@
                 <a:ea typeface="Calibri" pitchFamily="34" charset="-122"/>
                 <a:cs typeface="Calibri" pitchFamily="34" charset="-120"/>
               </a:rPr>
-              <a:t>Noise: Gaussian, std sigma x C = 75 per coordinate; expected noise L2 = 2475 against a clipped client norm of 25.</a:t>
-            </a:r>
-            <a:endParaRPr lang="en-US" sz="1600" dirty="0"/>
+              <a:t>Noise: Gaussian, std sigma x C per coordinate; in the product 75 per coordinate, expected noise L2 = 2475 against a clipped client norm of 25.</a:t>
+            </a:r>
+            <a:endParaRPr lang="en-US" sz="1500" dirty="0"/>
           </a:p>
           <a:p>
             <a:pPr marL="342900" indent="-342900">
@@ -4403,7 +4403,7 @@
               <a:buChar char="•"/>
             </a:pPr>
             <a:r>
-              <a:rPr lang="en-US" sz="1600" dirty="0">
+              <a:rPr lang="en-US" sz="1500" dirty="0">
                 <a:solidFill>
                   <a:srgbClr val="222222"/>
                 </a:solidFill>
@@ -4411,9 +4411,9 @@
                 <a:ea typeface="Calibri" pitchFamily="34" charset="-122"/>
                 <a:cs typeface="Calibri" pitchFamily="34" charset="-120"/>
               </a:rPr>
-              <a:t>Privacy: epsilon = sqrt(2 ln(1.25/delta)) / sigma = 1.6149 at delta = 1e-5; the classical bound needs epsilon &lt; 1, i.e. sigma &gt; 4.845.</a:t>
-            </a:r>
-            <a:endParaRPr lang="en-US" sz="1600" dirty="0"/>
+              <a:t>Privacy: epsilon = sqrt(2 ln(1.25/delta)) / sigma = 1.6149 at sigma 3, delta = 1e-5; the classical bound needs epsilon &lt; 1, i.e. sigma &gt; 4.845.</a:t>
+            </a:r>
+            <a:endParaRPr lang="en-US" sz="1500" dirty="0"/>
           </a:p>
           <a:p>
             <a:pPr marL="342900" indent="-342900">
@@ -4424,7 +4424,7 @@
               <a:buChar char="•"/>
             </a:pPr>
             <a:r>
-              <a:rPr lang="en-US" sz="1600" dirty="0">
+              <a:rPr lang="en-US" sz="1500" dirty="0">
                 <a:solidFill>
                   <a:srgbClr val="222222"/>
                 </a:solidFill>
@@ -4434,7 +4434,7 @@
               </a:rPr>
               <a:t>Thresholds: reference tolerance 1e-10; retention floor 70 %; utility = 0.65 x accuracy + 0.35 / (1 + ln(1 + perplexity)).</a:t>
             </a:r>
-            <a:endParaRPr lang="en-US" sz="1600" dirty="0"/>
+            <a:endParaRPr lang="en-US" sz="1500" dirty="0"/>
           </a:p>
         </p:txBody>
       </p:sp>
@@ -5571,7 +5571,7 @@
                         <a:buNone/>
                       </a:pPr>
                       <a:r>
-                        <a:rPr lang="en-US" sz="1800" b="1" dirty="0">
+                        <a:rPr lang="en-US" sz="1750" b="1" dirty="0">
                           <a:solidFill>
                             <a:srgbClr val="1F3864"/>
                           </a:solidFill>
@@ -5581,7 +5581,7 @@
                         </a:rPr>
                         <a:t>Module</a:t>
                       </a:r>
-                      <a:endParaRPr lang="en-US" sz="1800" dirty="0">
+                      <a:endParaRPr lang="en-US" sz="1750" dirty="0">
                         <a:latin typeface="Calibri" charset="0"/>
                         <a:ea typeface="Calibri" charset="0"/>
                         <a:cs typeface="Calibri" charset="0"/>
@@ -5639,7 +5639,7 @@
                         <a:buNone/>
                       </a:pPr>
                       <a:r>
-                        <a:rPr lang="en-US" sz="1800" b="1" dirty="0">
+                        <a:rPr lang="en-US" sz="1750" b="1" dirty="0">
                           <a:solidFill>
                             <a:srgbClr val="1F3864"/>
                           </a:solidFill>
@@ -5649,7 +5649,7 @@
                         </a:rPr>
                         <a:t>Implementation</a:t>
                       </a:r>
-                      <a:endParaRPr lang="en-US" sz="1800" dirty="0">
+                      <a:endParaRPr lang="en-US" sz="1750" dirty="0">
                         <a:latin typeface="Calibri" charset="0"/>
                         <a:ea typeface="Calibri" charset="0"/>
                         <a:cs typeface="Calibri" charset="0"/>
@@ -5709,7 +5709,7 @@
                         <a:buNone/>
                       </a:pPr>
                       <a:r>
-                        <a:rPr lang="en-US" sz="1800" dirty="0">
+                        <a:rPr lang="en-US" sz="1750" dirty="0">
                           <a:solidFill>
                             <a:srgbClr val="000000"/>
                           </a:solidFill>
@@ -5719,7 +5719,7 @@
                         </a:rPr>
                         <a:t>model.py</a:t>
                       </a:r>
-                      <a:endParaRPr lang="en-US" sz="1800" dirty="0">
+                      <a:endParaRPr lang="en-US" sz="1750" dirty="0">
                         <a:latin typeface="Calibri" charset="0"/>
                         <a:ea typeface="Calibri" charset="0"/>
                         <a:cs typeface="Calibri" charset="0"/>
@@ -5774,7 +5774,7 @@
                         <a:buNone/>
                       </a:pPr>
                       <a:r>
-                        <a:rPr lang="en-US" sz="1800" dirty="0">
+                        <a:rPr lang="en-US" sz="1750" dirty="0">
                           <a:solidFill>
                             <a:srgbClr val="000000"/>
                           </a:solidFill>
@@ -5784,7 +5784,7 @@
                         </a:rPr>
                         <a:t>Bigram counts, L2 clipping, perplexity, next-character accuracy, loss-based membership AUC, sampling</a:t>
                       </a:r>
-                      <a:endParaRPr lang="en-US" sz="1800" dirty="0">
+                      <a:endParaRPr lang="en-US" sz="1750" dirty="0">
                         <a:latin typeface="Calibri" charset="0"/>
                         <a:ea typeface="Calibri" charset="0"/>
                         <a:cs typeface="Calibri" charset="0"/>
@@ -5841,7 +5841,7 @@
                         <a:buNone/>
                       </a:pPr>
                       <a:r>
-                        <a:rPr lang="en-US" sz="1800" dirty="0">
+                        <a:rPr lang="en-US" sz="1750" dirty="0">
                           <a:solidFill>
                             <a:srgbClr val="000000"/>
                           </a:solidFill>
@@ -5851,7 +5851,7 @@
                         </a:rPr>
                         <a:t>engine.py</a:t>
                       </a:r>
-                      <a:endParaRPr lang="en-US" sz="1800" dirty="0">
+                      <a:endParaRPr lang="en-US" sz="1750" dirty="0">
                         <a:latin typeface="Calibri" charset="0"/>
                         <a:ea typeface="Calibri" charset="0"/>
                         <a:cs typeface="Calibri" charset="0"/>
@@ -5906,7 +5906,7 @@
                         <a:buNone/>
                       </a:pPr>
                       <a:r>
-                        <a:rPr lang="en-US" sz="1800" dirty="0">
+                        <a:rPr lang="en-US" sz="1750" dirty="0">
                           <a:solidFill>
                             <a:srgbClr val="000000"/>
                           </a:solidFill>
@@ -5916,7 +5916,7 @@
                         </a:rPr>
                         <a:t>train(): clip, sum, add noise; unlearn(): subtract, rebuild, verify, certificate; epsilon formula; guards for repeat and last client</a:t>
                       </a:r>
-                      <a:endParaRPr lang="en-US" sz="1800" dirty="0">
+                      <a:endParaRPr lang="en-US" sz="1750" dirty="0">
                         <a:latin typeface="Calibri" charset="0"/>
                         <a:ea typeface="Calibri" charset="0"/>
                         <a:cs typeface="Calibri" charset="0"/>
@@ -5973,7 +5973,7 @@
                         <a:buNone/>
                       </a:pPr>
                       <a:r>
-                        <a:rPr lang="en-US" sz="1800" dirty="0">
+                        <a:rPr lang="en-US" sz="1750" dirty="0">
                           <a:solidFill>
                             <a:srgbClr val="000000"/>
                           </a:solidFill>
@@ -5983,7 +5983,7 @@
                         </a:rPr>
                         <a:t>audit.py</a:t>
                       </a:r>
-                      <a:endParaRPr lang="en-US" sz="1800" dirty="0">
+                      <a:endParaRPr lang="en-US" sz="1750" dirty="0">
                         <a:latin typeface="Calibri" charset="0"/>
                         <a:ea typeface="Calibri" charset="0"/>
                         <a:cs typeface="Calibri" charset="0"/>
@@ -6038,7 +6038,7 @@
                         <a:buNone/>
                       </a:pPr>
                       <a:r>
-                        <a:rPr lang="en-US" sz="1800" dirty="0">
+                        <a:rPr lang="en-US" sz="1750" dirty="0">
                           <a:solidFill>
                             <a:srgbClr val="000000"/>
                           </a:solidFill>
@@ -6048,7 +6048,7 @@
                         </a:rPr>
                         <a:t>Append-only JSONL; record_hash = SHA-256(previous_hash | canonical JSON); verify() re-walks the chain</a:t>
                       </a:r>
-                      <a:endParaRPr lang="en-US" sz="1800" dirty="0">
+                      <a:endParaRPr lang="en-US" sz="1750" dirty="0">
                         <a:latin typeface="Calibri" charset="0"/>
                         <a:ea typeface="Calibri" charset="0"/>
                         <a:cs typeface="Calibri" charset="0"/>
@@ -6105,7 +6105,7 @@
                         <a:buNone/>
                       </a:pPr>
                       <a:r>
-                        <a:rPr lang="en-US" sz="1800" dirty="0">
+                        <a:rPr lang="en-US" sz="1750" dirty="0">
                           <a:solidFill>
                             <a:srgbClr val="000000"/>
                           </a:solidFill>
@@ -6115,7 +6115,7 @@
                         </a:rPr>
                         <a:t>web.py + app.py</a:t>
                       </a:r>
-                      <a:endParaRPr lang="en-US" sz="1800" dirty="0">
+                      <a:endParaRPr lang="en-US" sz="1750" dirty="0">
                         <a:latin typeface="Calibri" charset="0"/>
                         <a:ea typeface="Calibri" charset="0"/>
                         <a:cs typeface="Calibri" charset="0"/>
@@ -6170,7 +6170,7 @@
                         <a:buNone/>
                       </a:pPr>
                       <a:r>
-                        <a:rPr lang="en-US" sz="1800" dirty="0">
+                        <a:rPr lang="en-US" sz="1750" dirty="0">
                           <a:solidFill>
                             <a:srgbClr val="000000"/>
                           </a:solidFill>
@@ -6180,7 +6180,7 @@
                         </a:rPr>
                         <a:t>Standard-library threaded HTTP server; 9 routes; 1 MB body limit; JSON errors; also --demo and --desktop modes</a:t>
                       </a:r>
-                      <a:endParaRPr lang="en-US" sz="1800" dirty="0">
+                      <a:endParaRPr lang="en-US" sz="1750" dirty="0">
                         <a:latin typeface="Calibri" charset="0"/>
                         <a:ea typeface="Calibri" charset="0"/>
                         <a:cs typeface="Calibri" charset="0"/>
@@ -6237,7 +6237,7 @@
                         <a:buNone/>
                       </a:pPr>
                       <a:r>
-                        <a:rPr lang="en-US" sz="1800" dirty="0">
+                        <a:rPr lang="en-US" sz="1750" dirty="0">
                           <a:solidFill>
                             <a:srgbClr val="000000"/>
                           </a:solidFill>
@@ -6247,7 +6247,7 @@
                         </a:rPr>
                         <a:t>frontend/</a:t>
                       </a:r>
-                      <a:endParaRPr lang="en-US" sz="1800" dirty="0">
+                      <a:endParaRPr lang="en-US" sz="1750" dirty="0">
                         <a:latin typeface="Calibri" charset="0"/>
                         <a:ea typeface="Calibri" charset="0"/>
                         <a:cs typeface="Calibri" charset="0"/>
@@ -6302,7 +6302,7 @@
                         <a:buNone/>
                       </a:pPr>
                       <a:r>
-                        <a:rPr lang="en-US" sz="1800" dirty="0">
+                        <a:rPr lang="en-US" sz="1750" dirty="0">
                           <a:solidFill>
                             <a:srgbClr val="000000"/>
                           </a:solidFill>
@@ -6312,7 +6312,7 @@
                         </a:rPr>
                         <a:t>React 19, Vite 8, Recharts; five pages plus landing; toasts, confirm dialogs, dark mode</a:t>
                       </a:r>
-                      <a:endParaRPr lang="en-US" sz="1800" dirty="0">
+                      <a:endParaRPr lang="en-US" sz="1750" dirty="0">
                         <a:latin typeface="Calibri" charset="0"/>
                         <a:ea typeface="Calibri" charset="0"/>
                         <a:cs typeface="Calibri" charset="0"/>
@@ -6369,7 +6369,7 @@
                         <a:buNone/>
                       </a:pPr>
                       <a:r>
-                        <a:rPr lang="en-US" sz="1800" dirty="0">
+                        <a:rPr lang="en-US" sz="1750" dirty="0">
                           <a:solidFill>
                             <a:srgbClr val="000000"/>
                           </a:solidFill>
@@ -6379,7 +6379,7 @@
                         </a:rPr>
                         <a:t>tests/ + scripts/</a:t>
                       </a:r>
-                      <a:endParaRPr lang="en-US" sz="1800" dirty="0">
+                      <a:endParaRPr lang="en-US" sz="1750" dirty="0">
                         <a:latin typeface="Calibri" charset="0"/>
                         <a:ea typeface="Calibri" charset="0"/>
                         <a:cs typeface="Calibri" charset="0"/>
@@ -6434,7 +6434,7 @@
                         <a:buNone/>
                       </a:pPr>
                       <a:r>
-                        <a:rPr lang="en-US" sz="1800" dirty="0">
+                        <a:rPr lang="en-US" sz="1750" dirty="0">
                           <a:solidFill>
                             <a:srgbClr val="000000"/>
                           </a:solidFill>
@@ -6442,9 +6442,9 @@
                           <a:ea typeface="Calibri" pitchFamily="34" charset="-122"/>
                           <a:cs typeface="Calibri" pitchFamily="34" charset="-120"/>
                         </a:rPr>
-                        <a:t>5 unit tests, 14-check smoke test, and run_experiments.py (11 measurement experiments)</a:t>
+                        <a:t>5 unit tests, 14-check smoke test, and four measurement scripts: run_experiments.py, run_synthetic_corpus.py, run_neural_experiment.py, run_testing_experiments.py</a:t>
                       </a:r>
-                      <a:endParaRPr lang="en-US" sz="1800" dirty="0">
+                      <a:endParaRPr lang="en-US" sz="1750" dirty="0">
                         <a:latin typeface="Calibri" charset="0"/>
                         <a:ea typeface="Calibri" charset="0"/>
                         <a:cs typeface="Calibri" charset="0"/>
@@ -6711,9 +6711,9 @@
             <a:tbl>
               <a:tblPr/>
               <a:tblGrid>
-                <a:gridCol w="3824020"/>
-                <a:gridCol w="2924251"/>
-                <a:gridCol w="4498848"/>
+                <a:gridCol w="3374136"/>
+                <a:gridCol w="4273905"/>
+                <a:gridCol w="3599078"/>
               </a:tblGrid>
               <a:tr h="0">
                 <a:tc>
@@ -6725,7 +6725,7 @@
                         <a:buNone/>
                       </a:pPr>
                       <a:r>
-                        <a:rPr lang="en-US" sz="1700" b="1" dirty="0">
+                        <a:rPr lang="en-US" sz="1300" b="1" dirty="0">
                           <a:solidFill>
                             <a:srgbClr val="1F3864"/>
                           </a:solidFill>
@@ -6735,7 +6735,7 @@
                         </a:rPr>
                         <a:t>Measure</a:t>
                       </a:r>
-                      <a:endParaRPr lang="en-US" sz="1700" dirty="0">
+                      <a:endParaRPr lang="en-US" sz="1300" dirty="0">
                         <a:latin typeface="Calibri" charset="0"/>
                         <a:ea typeface="Calibri" charset="0"/>
                         <a:cs typeface="Calibri" charset="0"/>
@@ -6793,7 +6793,7 @@
                         <a:buNone/>
                       </a:pPr>
                       <a:r>
-                        <a:rPr lang="en-US" sz="1700" b="1" dirty="0">
+                        <a:rPr lang="en-US" sz="1300" b="1" dirty="0">
                           <a:solidFill>
                             <a:srgbClr val="1F3864"/>
                           </a:solidFill>
@@ -6803,7 +6803,7 @@
                         </a:rPr>
                         <a:t>Result</a:t>
                       </a:r>
-                      <a:endParaRPr lang="en-US" sz="1700" dirty="0">
+                      <a:endParaRPr lang="en-US" sz="1300" dirty="0">
                         <a:latin typeface="Calibri" charset="0"/>
                         <a:ea typeface="Calibri" charset="0"/>
                         <a:cs typeface="Calibri" charset="0"/>
@@ -6861,7 +6861,7 @@
                         <a:buNone/>
                       </a:pPr>
                       <a:r>
-                        <a:rPr lang="en-US" sz="1700" b="1" dirty="0">
+                        <a:rPr lang="en-US" sz="1300" b="1" dirty="0">
                           <a:solidFill>
                             <a:srgbClr val="1F3864"/>
                           </a:solidFill>
@@ -6871,7 +6871,7 @@
                         </a:rPr>
                         <a:t>Note</a:t>
                       </a:r>
-                      <a:endParaRPr lang="en-US" sz="1700" dirty="0">
+                      <a:endParaRPr lang="en-US" sz="1300" dirty="0">
                         <a:latin typeface="Calibri" charset="0"/>
                         <a:ea typeface="Calibri" charset="0"/>
                         <a:cs typeface="Calibri" charset="0"/>
@@ -6931,7 +6931,7 @@
                         <a:buNone/>
                       </a:pPr>
                       <a:r>
-                        <a:rPr lang="en-US" sz="1700" dirty="0">
+                        <a:rPr lang="en-US" sz="1300" dirty="0">
                           <a:solidFill>
                             <a:srgbClr val="000000"/>
                           </a:solidFill>
@@ -6941,7 +6941,7 @@
                         </a:rPr>
                         <a:t>Default run (seed 2026), 5 removals</a:t>
                       </a:r>
-                      <a:endParaRPr lang="en-US" sz="1700" dirty="0">
+                      <a:endParaRPr lang="en-US" sz="1300" dirty="0">
                         <a:latin typeface="Calibri" charset="0"/>
                         <a:ea typeface="Calibri" charset="0"/>
                         <a:cs typeface="Calibri" charset="0"/>
@@ -6996,7 +6996,7 @@
                         <a:buNone/>
                       </a:pPr>
                       <a:r>
-                        <a:rPr lang="en-US" sz="1700" dirty="0">
+                        <a:rPr lang="en-US" sz="1300" dirty="0">
                           <a:solidFill>
                             <a:srgbClr val="000000"/>
                           </a:solidFill>
@@ -7006,7 +7006,7 @@
                         </a:rPr>
                         <a:t>5 / 5 CERTIFIED</a:t>
                       </a:r>
-                      <a:endParaRPr lang="en-US" sz="1700" dirty="0">
+                      <a:endParaRPr lang="en-US" sz="1300" dirty="0">
                         <a:latin typeface="Calibri" charset="0"/>
                         <a:ea typeface="Calibri" charset="0"/>
                         <a:cs typeface="Calibri" charset="0"/>
@@ -7061,7 +7061,7 @@
                         <a:buNone/>
                       </a:pPr>
                       <a:r>
-                        <a:rPr lang="en-US" sz="1700" dirty="0">
+                        <a:rPr lang="en-US" sz="1300" dirty="0">
                           <a:solidFill>
                             <a:srgbClr val="000000"/>
                           </a:solidFill>
@@ -7071,7 +7071,7 @@
                         </a:rPr>
                         <a:t>reference L2 &lt;= 2.8e-14; retention 93.6-98.8 %</a:t>
                       </a:r>
-                      <a:endParaRPr lang="en-US" sz="1700" dirty="0">
+                      <a:endParaRPr lang="en-US" sz="1300" dirty="0">
                         <a:latin typeface="Calibri" charset="0"/>
                         <a:ea typeface="Calibri" charset="0"/>
                         <a:cs typeface="Calibri" charset="0"/>
@@ -7128,7 +7128,7 @@
                         <a:buNone/>
                       </a:pPr>
                       <a:r>
-                        <a:rPr lang="en-US" sz="1700" dirty="0">
+                        <a:rPr lang="en-US" sz="1300" dirty="0">
                           <a:solidFill>
                             <a:srgbClr val="000000"/>
                           </a:solidFill>
@@ -7138,7 +7138,7 @@
                         </a:rPr>
                         <a:t>Seed study, 250 requests</a:t>
                       </a:r>
-                      <a:endParaRPr lang="en-US" sz="1700" dirty="0">
+                      <a:endParaRPr lang="en-US" sz="1300" dirty="0">
                         <a:latin typeface="Calibri" charset="0"/>
                         <a:ea typeface="Calibri" charset="0"/>
                         <a:cs typeface="Calibri" charset="0"/>
@@ -7193,7 +7193,7 @@
                         <a:buNone/>
                       </a:pPr>
                       <a:r>
-                        <a:rPr lang="en-US" sz="1700" dirty="0">
+                        <a:rPr lang="en-US" sz="1300" dirty="0">
                           <a:solidFill>
                             <a:srgbClr val="000000"/>
                           </a:solidFill>
@@ -7203,7 +7203,7 @@
                         </a:rPr>
                         <a:t>250 / 250 CERTIFIED</a:t>
                       </a:r>
-                      <a:endParaRPr lang="en-US" sz="1700" dirty="0">
+                      <a:endParaRPr lang="en-US" sz="1300" dirty="0">
                         <a:latin typeface="Calibri" charset="0"/>
                         <a:ea typeface="Calibri" charset="0"/>
                         <a:cs typeface="Calibri" charset="0"/>
@@ -7258,7 +7258,7 @@
                         <a:buNone/>
                       </a:pPr>
                       <a:r>
-                        <a:rPr lang="en-US" sz="1700" dirty="0">
+                        <a:rPr lang="en-US" sz="1300" dirty="0">
                           <a:solidFill>
                             <a:srgbClr val="000000"/>
                           </a:solidFill>
@@ -7268,7 +7268,7 @@
                         </a:rPr>
                         <a:t>retention 97.1 ± 3.5 % (min 79.9)</a:t>
                       </a:r>
-                      <a:endParaRPr lang="en-US" sz="1700" dirty="0">
+                      <a:endParaRPr lang="en-US" sz="1300" dirty="0">
                         <a:latin typeface="Calibri" charset="0"/>
                         <a:ea typeface="Calibri" charset="0"/>
                         <a:cs typeface="Calibri" charset="0"/>
@@ -7325,7 +7325,7 @@
                         <a:buNone/>
                       </a:pPr>
                       <a:r>
-                        <a:rPr lang="en-US" sz="1700" dirty="0">
+                        <a:rPr lang="en-US" sz="1300" dirty="0">
                           <a:solidFill>
                             <a:srgbClr val="000000"/>
                           </a:solidFill>
@@ -7335,7 +7335,7 @@
                         </a:rPr>
                         <a:t>Perplexity at sigma = 3</a:t>
                       </a:r>
-                      <a:endParaRPr lang="en-US" sz="1700" dirty="0">
+                      <a:endParaRPr lang="en-US" sz="1300" dirty="0">
                         <a:latin typeface="Calibri" charset="0"/>
                         <a:ea typeface="Calibri" charset="0"/>
                         <a:cs typeface="Calibri" charset="0"/>
@@ -7390,7 +7390,7 @@
                         <a:buNone/>
                       </a:pPr>
                       <a:r>
-                        <a:rPr lang="en-US" sz="1700" dirty="0">
+                        <a:rPr lang="en-US" sz="1300" dirty="0">
                           <a:solidFill>
                             <a:srgbClr val="000000"/>
                           </a:solidFill>
@@ -7400,7 +7400,7 @@
                         </a:rPr>
                         <a:t>130.2 (seed 2026); 142 ± 28</a:t>
                       </a:r>
-                      <a:endParaRPr lang="en-US" sz="1700" dirty="0">
+                      <a:endParaRPr lang="en-US" sz="1300" dirty="0">
                         <a:latin typeface="Calibri" charset="0"/>
                         <a:ea typeface="Calibri" charset="0"/>
                         <a:cs typeface="Calibri" charset="0"/>
@@ -7455,7 +7455,7 @@
                         <a:buNone/>
                       </a:pPr>
                       <a:r>
-                        <a:rPr lang="en-US" sz="1700" dirty="0">
+                        <a:rPr lang="en-US" sz="1300" dirty="0">
                           <a:solidFill>
                             <a:srgbClr val="000000"/>
                           </a:solidFill>
@@ -7465,7 +7465,7 @@
                         </a:rPr>
                         <a:t>uniform model = 32; accuracy about 4-5 %</a:t>
                       </a:r>
-                      <a:endParaRPr lang="en-US" sz="1700" dirty="0">
+                      <a:endParaRPr lang="en-US" sz="1300" dirty="0">
                         <a:latin typeface="Calibri" charset="0"/>
                         <a:ea typeface="Calibri" charset="0"/>
                         <a:cs typeface="Calibri" charset="0"/>
@@ -7522,7 +7522,7 @@
                         <a:buNone/>
                       </a:pPr>
                       <a:r>
-                        <a:rPr lang="en-US" sz="1700" dirty="0">
+                        <a:rPr lang="en-US" sz="1300" dirty="0">
                           <a:solidFill>
                             <a:srgbClr val="000000"/>
                           </a:solidFill>
@@ -7532,7 +7532,7 @@
                         </a:rPr>
                         <a:t>Membership AUC before / after</a:t>
                       </a:r>
-                      <a:endParaRPr lang="en-US" sz="1700" dirty="0">
+                      <a:endParaRPr lang="en-US" sz="1300" dirty="0">
                         <a:latin typeface="Calibri" charset="0"/>
                         <a:ea typeface="Calibri" charset="0"/>
                         <a:cs typeface="Calibri" charset="0"/>
@@ -7587,7 +7587,7 @@
                         <a:buNone/>
                       </a:pPr>
                       <a:r>
-                        <a:rPr lang="en-US" sz="1700" dirty="0">
+                        <a:rPr lang="en-US" sz="1300" dirty="0">
                           <a:solidFill>
                             <a:srgbClr val="000000"/>
                           </a:solidFill>
@@ -7597,7 +7597,7 @@
                         </a:rPr>
                         <a:t>0.524 / 0.495</a:t>
                       </a:r>
-                      <a:endParaRPr lang="en-US" sz="1700" dirty="0">
+                      <a:endParaRPr lang="en-US" sz="1300" dirty="0">
                         <a:latin typeface="Calibri" charset="0"/>
                         <a:ea typeface="Calibri" charset="0"/>
                         <a:cs typeface="Calibri" charset="0"/>
@@ -7652,7 +7652,7 @@
                         <a:buNone/>
                       </a:pPr>
                       <a:r>
-                        <a:rPr lang="en-US" sz="1700" dirty="0">
+                        <a:rPr lang="en-US" sz="1300" dirty="0">
                           <a:solidFill>
                             <a:srgbClr val="000000"/>
                           </a:solidFill>
@@ -7662,7 +7662,7 @@
                         </a:rPr>
                         <a:t>chance = 0.5; sd 0.22; change -0.029</a:t>
                       </a:r>
-                      <a:endParaRPr lang="en-US" sz="1700" dirty="0">
+                      <a:endParaRPr lang="en-US" sz="1300" dirty="0">
                         <a:latin typeface="Calibri" charset="0"/>
                         <a:ea typeface="Calibri" charset="0"/>
                         <a:cs typeface="Calibri" charset="0"/>
@@ -7719,7 +7719,7 @@
                         <a:buNone/>
                       </a:pPr>
                       <a:r>
-                        <a:rPr lang="en-US" sz="1700" dirty="0">
+                        <a:rPr lang="en-US" sz="1300" dirty="0">
                           <a:solidFill>
                             <a:srgbClr val="000000"/>
                           </a:solidFill>
@@ -7727,9 +7727,9 @@
                           <a:ea typeface="Calibri" pitchFamily="34" charset="-122"/>
                           <a:cs typeface="Calibri" pitchFamily="34" charset="-120"/>
                         </a:rPr>
-                        <a:t>Unlearned vs fresh retrain (L2, sigma 3)</a:t>
+                        <a:t>Unlearned vs fresh retrain (L2)</a:t>
                       </a:r>
-                      <a:endParaRPr lang="en-US" sz="1700" dirty="0">
+                      <a:endParaRPr lang="en-US" sz="1300" dirty="0">
                         <a:latin typeface="Calibri" charset="0"/>
                         <a:ea typeface="Calibri" charset="0"/>
                         <a:cs typeface="Calibri" charset="0"/>
@@ -7784,7 +7784,7 @@
                         <a:buNone/>
                       </a:pPr>
                       <a:r>
-                        <a:rPr lang="en-US" sz="1700" dirty="0">
+                        <a:rPr lang="en-US" sz="1300" dirty="0">
                           <a:solidFill>
                             <a:srgbClr val="000000"/>
                           </a:solidFill>
@@ -7792,9 +7792,9 @@
                           <a:ea typeface="Calibri" pitchFamily="34" charset="-122"/>
                           <a:cs typeface="Calibri" pitchFamily="34" charset="-120"/>
                         </a:rPr>
-                        <a:t>875 vs 881</a:t>
+                        <a:t>bigram 875 vs 881; synthetic corpus 645 vs 650; neural 31.8 vs 31.8</a:t>
                       </a:r>
-                      <a:endParaRPr lang="en-US" sz="1700" dirty="0">
+                      <a:endParaRPr lang="en-US" sz="1300" dirty="0">
                         <a:latin typeface="Calibri" charset="0"/>
                         <a:ea typeface="Calibri" charset="0"/>
                         <a:cs typeface="Calibri" charset="0"/>
@@ -7849,7 +7849,7 @@
                         <a:buNone/>
                       </a:pPr>
                       <a:r>
-                        <a:rPr lang="en-US" sz="1700" dirty="0">
+                        <a:rPr lang="en-US" sz="1300" dirty="0">
                           <a:solidFill>
                             <a:srgbClr val="000000"/>
                           </a:solidFill>
@@ -7857,9 +7857,9 @@
                           <a:ea typeface="Calibri" pitchFamily="34" charset="-122"/>
                           <a:cs typeface="Calibri" pitchFamily="34" charset="-120"/>
                         </a:rPr>
-                        <a:t>retrain vs retrain; both are just the noise</a:t>
+                        <a:t>unlearned vs retrain equals retrain vs retrain; both are just the noise</a:t>
                       </a:r>
-                      <a:endParaRPr lang="en-US" sz="1700" dirty="0">
+                      <a:endParaRPr lang="en-US" sz="1300" dirty="0">
                         <a:latin typeface="Calibri" charset="0"/>
                         <a:ea typeface="Calibri" charset="0"/>
                         <a:cs typeface="Calibri" charset="0"/>
@@ -7916,7 +7916,7 @@
                         <a:buNone/>
                       </a:pPr>
                       <a:r>
-                        <a:rPr lang="en-US" sz="1700" dirty="0">
+                        <a:rPr lang="en-US" sz="1300" dirty="0">
                           <a:solidFill>
                             <a:srgbClr val="000000"/>
                           </a:solidFill>
@@ -7924,9 +7924,9 @@
                           <a:ea typeface="Calibri" pitchFamily="34" charset="-122"/>
                           <a:cs typeface="Calibri" pitchFamily="34" charset="-120"/>
                         </a:rPr>
-                        <a:t>Noise-free membership AUC</a:t>
+                        <a:t>Noise-free attack AUC</a:t>
                       </a:r>
-                      <a:endParaRPr lang="en-US" sz="1700" dirty="0">
+                      <a:endParaRPr lang="en-US" sz="1300" dirty="0">
                         <a:latin typeface="Calibri" charset="0"/>
                         <a:ea typeface="Calibri" charset="0"/>
                         <a:cs typeface="Calibri" charset="0"/>
@@ -7981,7 +7981,7 @@
                         <a:buNone/>
                       </a:pPr>
                       <a:r>
-                        <a:rPr lang="en-US" sz="1700" dirty="0">
+                        <a:rPr lang="en-US" sz="1300" dirty="0">
                           <a:solidFill>
                             <a:srgbClr val="000000"/>
                           </a:solidFill>
@@ -7989,9 +7989,9 @@
                           <a:ea typeface="Calibri" pitchFamily="34" charset="-122"/>
                           <a:cs typeface="Calibri" pitchFamily="34" charset="-120"/>
                         </a:rPr>
-                        <a:t>0.99 → 0.54</a:t>
+                        <a:t>bigram 0.99 → 0.54; neural client-level 0.78 → 0.53</a:t>
                       </a:r>
-                      <a:endParaRPr lang="en-US" sz="1700" dirty="0">
+                      <a:endParaRPr lang="en-US" sz="1300" dirty="0">
                         <a:latin typeface="Calibri" charset="0"/>
                         <a:ea typeface="Calibri" charset="0"/>
                         <a:cs typeface="Calibri" charset="0"/>
@@ -8046,7 +8046,7 @@
                         <a:buNone/>
                       </a:pPr>
                       <a:r>
-                        <a:rPr lang="en-US" sz="1700" dirty="0">
+                        <a:rPr lang="en-US" sz="1300" dirty="0">
                           <a:solidFill>
                             <a:srgbClr val="000000"/>
                           </a:solidFill>
@@ -8054,9 +8054,9 @@
                           <a:ea typeface="Calibri" pitchFamily="34" charset="-122"/>
                           <a:cs typeface="Calibri" pitchFamily="34" charset="-120"/>
                         </a:rPr>
-                        <a:t>sigma = 1e-6: the removal itself works</a:t>
+                        <a:t>fresh retrain 0.53: the removal itself works</a:t>
                       </a:r>
-                      <a:endParaRPr lang="en-US" sz="1700" dirty="0">
+                      <a:endParaRPr lang="en-US" sz="1300" dirty="0">
                         <a:latin typeface="Calibri" charset="0"/>
                         <a:ea typeface="Calibri" charset="0"/>
                         <a:cs typeface="Calibri" charset="0"/>
@@ -8113,7 +8113,7 @@
                         <a:buNone/>
                       </a:pPr>
                       <a:r>
-                        <a:rPr lang="en-US" sz="1700" dirty="0">
+                        <a:rPr lang="en-US" sz="1300" dirty="0">
                           <a:solidFill>
                             <a:srgbClr val="000000"/>
                           </a:solidFill>
@@ -8121,9 +8121,9 @@
                           <a:ea typeface="Calibri" pitchFamily="34" charset="-122"/>
                           <a:cs typeface="Calibri" pitchFamily="34" charset="-120"/>
                         </a:rPr>
-                        <a:t>Audit tamper cases detected</a:t>
+                        <a:t>Neural adapters, retention</a:t>
                       </a:r>
-                      <a:endParaRPr lang="en-US" sz="1700" dirty="0">
+                      <a:endParaRPr lang="en-US" sz="1300" dirty="0">
                         <a:latin typeface="Calibri" charset="0"/>
                         <a:ea typeface="Calibri" charset="0"/>
                         <a:cs typeface="Calibri" charset="0"/>
@@ -8178,7 +8178,7 @@
                         <a:buNone/>
                       </a:pPr>
                       <a:r>
-                        <a:rPr lang="en-US" sz="1700" dirty="0">
+                        <a:rPr lang="en-US" sz="1300" dirty="0">
                           <a:solidFill>
                             <a:srgbClr val="000000"/>
                           </a:solidFill>
@@ -8186,9 +8186,9 @@
                           <a:ea typeface="Calibri" pitchFamily="34" charset="-122"/>
                           <a:cs typeface="Calibri" pitchFamily="34" charset="-120"/>
                         </a:rPr>
-                        <a:t>4 of 7 attacks</a:t>
+                        <a:t>99.9 % (no noise); 92 % (sigma 0.05)</a:t>
                       </a:r>
-                      <a:endParaRPr lang="en-US" sz="1700" dirty="0">
+                      <a:endParaRPr lang="en-US" sz="1300" dirty="0">
                         <a:latin typeface="Calibri" charset="0"/>
                         <a:ea typeface="Calibri" charset="0"/>
                         <a:cs typeface="Calibri" charset="0"/>
@@ -8243,7 +8243,7 @@
                         <a:buNone/>
                       </a:pPr>
                       <a:r>
-                        <a:rPr lang="en-US" sz="1700" dirty="0">
+                        <a:rPr lang="en-US" sz="1300" dirty="0">
                           <a:solidFill>
                             <a:srgbClr val="000000"/>
                           </a:solidFill>
@@ -8251,9 +8251,9 @@
                           <a:ea typeface="Calibri" pitchFamily="34" charset="-122"/>
                           <a:cs typeface="Calibri" pitchFamily="34" charset="-120"/>
                         </a:rPr>
-                        <a:t>edit, flip, delete, swap caught; truncation and re-hash forgery not</a:t>
+                        <a:t>useful only for sigma &lt;= 0.05; destroyed from sigma 0.3</a:t>
                       </a:r>
-                      <a:endParaRPr lang="en-US" sz="1700" dirty="0">
+                      <a:endParaRPr lang="en-US" sz="1300" dirty="0">
                         <a:latin typeface="Calibri" charset="0"/>
                         <a:ea typeface="Calibri" charset="0"/>
                         <a:cs typeface="Calibri" charset="0"/>
@@ -8310,7 +8310,7 @@
                         <a:buNone/>
                       </a:pPr>
                       <a:r>
-                        <a:rPr lang="en-US" sz="1700" dirty="0">
+                        <a:rPr lang="en-US" sz="1300" dirty="0">
                           <a:solidFill>
                             <a:srgbClr val="000000"/>
                           </a:solidFill>
@@ -8318,9 +8318,9 @@
                           <a:ea typeface="Calibri" pitchFamily="34" charset="-122"/>
                           <a:cs typeface="Calibri" pitchFamily="34" charset="-120"/>
                         </a:rPr>
-                        <a:t>Automated checks</a:t>
+                        <a:t>Clients for epsilon &lt; 1 (synthetic corpus)</a:t>
                       </a:r>
-                      <a:endParaRPr lang="en-US" sz="1700" dirty="0">
+                      <a:endParaRPr lang="en-US" sz="1300" dirty="0">
                         <a:latin typeface="Calibri" charset="0"/>
                         <a:ea typeface="Calibri" charset="0"/>
                         <a:cs typeface="Calibri" charset="0"/>
@@ -8375,7 +8375,7 @@
                         <a:buNone/>
                       </a:pPr>
                       <a:r>
-                        <a:rPr lang="en-US" sz="1700" dirty="0">
+                        <a:rPr lang="en-US" sz="1300" dirty="0">
                           <a:solidFill>
                             <a:srgbClr val="000000"/>
                           </a:solidFill>
@@ -8383,9 +8383,9 @@
                           <a:ea typeface="Calibri" pitchFamily="34" charset="-122"/>
                           <a:cs typeface="Calibri" pitchFamily="34" charset="-120"/>
                         </a:rPr>
-                        <a:t>5 unit + 14 smoke pass</a:t>
+                        <a:t>about 1,000</a:t>
                       </a:r>
-                      <a:endParaRPr lang="en-US" sz="1700" dirty="0">
+                      <a:endParaRPr lang="en-US" sz="1300" dirty="0">
                         <a:latin typeface="Calibri" charset="0"/>
                         <a:ea typeface="Calibri" charset="0"/>
                         <a:cs typeface="Calibri" charset="0"/>
@@ -8440,7 +8440,7 @@
                         <a:buNone/>
                       </a:pPr>
                       <a:r>
-                        <a:rPr lang="en-US" sz="1700" dirty="0">
+                        <a:rPr lang="en-US" sz="1300" dirty="0">
                           <a:solidFill>
                             <a:srgbClr val="000000"/>
                           </a:solidFill>
@@ -8448,9 +8448,206 @@
                           <a:ea typeface="Calibri" pitchFamily="34" charset="-122"/>
                           <a:cs typeface="Calibri" pitchFamily="34" charset="-120"/>
                         </a:rPr>
-                        <a:t>no load, LLM or penetration tests</a:t>
+                        <a:t>perplexity within 1.2x of noise-free at sigma 4.85</a:t>
                       </a:r>
-                      <a:endParaRPr lang="en-US" sz="1700" dirty="0">
+                      <a:endParaRPr lang="en-US" sz="1300" dirty="0">
+                        <a:latin typeface="Calibri" charset="0"/>
+                        <a:ea typeface="Calibri" charset="0"/>
+                        <a:cs typeface="Calibri" charset="0"/>
+                      </a:endParaRPr>
+                    </a:p>
+                  </a:txBody>
+                  <a:tcPr marL="91440" marR="91440" marT="45720" marB="45720" anchor="ctr">
+                    <a:lnL w="9525" cap="flat" cmpd="sng" algn="ctr">
+                      <a:solidFill>
+                        <a:srgbClr val="A6A6A6"/>
+                      </a:solidFill>
+                      <a:prstDash val="solid"/>
+                      <a:round/>
+                      <a:headEnd type="none" w="med" len="med"/>
+                      <a:tailEnd type="none" w="med" len="med"/>
+                    </a:lnL>
+                    <a:lnR w="9525" cap="flat" cmpd="sng" algn="ctr">
+                      <a:solidFill>
+                        <a:srgbClr val="A6A6A6"/>
+                      </a:solidFill>
+                      <a:prstDash val="solid"/>
+                      <a:round/>
+                      <a:headEnd type="none" w="med" len="med"/>
+                      <a:tailEnd type="none" w="med" len="med"/>
+                    </a:lnR>
+                    <a:lnT w="9525" cap="flat" cmpd="sng" algn="ctr">
+                      <a:solidFill>
+                        <a:srgbClr val="A6A6A6"/>
+                      </a:solidFill>
+                      <a:prstDash val="solid"/>
+                      <a:round/>
+                      <a:headEnd type="none" w="med" len="med"/>
+                      <a:tailEnd type="none" w="med" len="med"/>
+                    </a:lnT>
+                    <a:lnB w="9525" cap="flat" cmpd="sng" algn="ctr">
+                      <a:solidFill>
+                        <a:srgbClr val="A6A6A6"/>
+                      </a:solidFill>
+                      <a:prstDash val="solid"/>
+                      <a:round/>
+                      <a:headEnd type="none" w="med" len="med"/>
+                      <a:tailEnd type="none" w="med" len="med"/>
+                    </a:lnB>
+                  </a:tcPr>
+                </a:tc>
+              </a:tr>
+              <a:tr h="0">
+                <a:tc>
+                  <a:txBody>
+                    <a:bodyPr/>
+                    <a:lstStyle/>
+                    <a:p>
+                      <a:pPr indent="0" marL="0">
+                        <a:buNone/>
+                      </a:pPr>
+                      <a:r>
+                        <a:rPr lang="en-US" sz="1300" dirty="0">
+                          <a:solidFill>
+                            <a:srgbClr val="000000"/>
+                          </a:solidFill>
+                          <a:latin typeface="Calibri" pitchFamily="34" charset="0"/>
+                          <a:ea typeface="Calibri" pitchFamily="34" charset="-122"/>
+                          <a:cs typeface="Calibri" pitchFamily="34" charset="-120"/>
+                        </a:rPr>
+                        <a:t>Audit tamper cases detected</a:t>
+                      </a:r>
+                      <a:endParaRPr lang="en-US" sz="1300" dirty="0">
+                        <a:latin typeface="Calibri" charset="0"/>
+                        <a:ea typeface="Calibri" charset="0"/>
+                        <a:cs typeface="Calibri" charset="0"/>
+                      </a:endParaRPr>
+                    </a:p>
+                  </a:txBody>
+                  <a:tcPr marL="91440" marR="91440" marT="45720" marB="45720" anchor="ctr">
+                    <a:lnL w="9525" cap="flat" cmpd="sng" algn="ctr">
+                      <a:solidFill>
+                        <a:srgbClr val="A6A6A6"/>
+                      </a:solidFill>
+                      <a:prstDash val="solid"/>
+                      <a:round/>
+                      <a:headEnd type="none" w="med" len="med"/>
+                      <a:tailEnd type="none" w="med" len="med"/>
+                    </a:lnL>
+                    <a:lnR w="9525" cap="flat" cmpd="sng" algn="ctr">
+                      <a:solidFill>
+                        <a:srgbClr val="A6A6A6"/>
+                      </a:solidFill>
+                      <a:prstDash val="solid"/>
+                      <a:round/>
+                      <a:headEnd type="none" w="med" len="med"/>
+                      <a:tailEnd type="none" w="med" len="med"/>
+                    </a:lnR>
+                    <a:lnT w="9525" cap="flat" cmpd="sng" algn="ctr">
+                      <a:solidFill>
+                        <a:srgbClr val="A6A6A6"/>
+                      </a:solidFill>
+                      <a:prstDash val="solid"/>
+                      <a:round/>
+                      <a:headEnd type="none" w="med" len="med"/>
+                      <a:tailEnd type="none" w="med" len="med"/>
+                    </a:lnT>
+                    <a:lnB w="9525" cap="flat" cmpd="sng" algn="ctr">
+                      <a:solidFill>
+                        <a:srgbClr val="A6A6A6"/>
+                      </a:solidFill>
+                      <a:prstDash val="solid"/>
+                      <a:round/>
+                      <a:headEnd type="none" w="med" len="med"/>
+                      <a:tailEnd type="none" w="med" len="med"/>
+                    </a:lnB>
+                  </a:tcPr>
+                </a:tc>
+                <a:tc>
+                  <a:txBody>
+                    <a:bodyPr/>
+                    <a:lstStyle/>
+                    <a:p>
+                      <a:pPr indent="0" marL="0">
+                        <a:buNone/>
+                      </a:pPr>
+                      <a:r>
+                        <a:rPr lang="en-US" sz="1300" dirty="0">
+                          <a:solidFill>
+                            <a:srgbClr val="000000"/>
+                          </a:solidFill>
+                          <a:latin typeface="Calibri" pitchFamily="34" charset="0"/>
+                          <a:ea typeface="Calibri" pitchFamily="34" charset="-122"/>
+                          <a:cs typeface="Calibri" pitchFamily="34" charset="-120"/>
+                        </a:rPr>
+                        <a:t>4 of 7 attacks</a:t>
+                      </a:r>
+                      <a:endParaRPr lang="en-US" sz="1300" dirty="0">
+                        <a:latin typeface="Calibri" charset="0"/>
+                        <a:ea typeface="Calibri" charset="0"/>
+                        <a:cs typeface="Calibri" charset="0"/>
+                      </a:endParaRPr>
+                    </a:p>
+                  </a:txBody>
+                  <a:tcPr marL="91440" marR="91440" marT="45720" marB="45720" anchor="ctr">
+                    <a:lnL w="9525" cap="flat" cmpd="sng" algn="ctr">
+                      <a:solidFill>
+                        <a:srgbClr val="A6A6A6"/>
+                      </a:solidFill>
+                      <a:prstDash val="solid"/>
+                      <a:round/>
+                      <a:headEnd type="none" w="med" len="med"/>
+                      <a:tailEnd type="none" w="med" len="med"/>
+                    </a:lnL>
+                    <a:lnR w="9525" cap="flat" cmpd="sng" algn="ctr">
+                      <a:solidFill>
+                        <a:srgbClr val="A6A6A6"/>
+                      </a:solidFill>
+                      <a:prstDash val="solid"/>
+                      <a:round/>
+                      <a:headEnd type="none" w="med" len="med"/>
+                      <a:tailEnd type="none" w="med" len="med"/>
+                    </a:lnR>
+                    <a:lnT w="9525" cap="flat" cmpd="sng" algn="ctr">
+                      <a:solidFill>
+                        <a:srgbClr val="A6A6A6"/>
+                      </a:solidFill>
+                      <a:prstDash val="solid"/>
+                      <a:round/>
+                      <a:headEnd type="none" w="med" len="med"/>
+                      <a:tailEnd type="none" w="med" len="med"/>
+                    </a:lnT>
+                    <a:lnB w="9525" cap="flat" cmpd="sng" algn="ctr">
+                      <a:solidFill>
+                        <a:srgbClr val="A6A6A6"/>
+                      </a:solidFill>
+                      <a:prstDash val="solid"/>
+                      <a:round/>
+                      <a:headEnd type="none" w="med" len="med"/>
+                      <a:tailEnd type="none" w="med" len="med"/>
+                    </a:lnB>
+                  </a:tcPr>
+                </a:tc>
+                <a:tc>
+                  <a:txBody>
+                    <a:bodyPr/>
+                    <a:lstStyle/>
+                    <a:p>
+                      <a:pPr indent="0" marL="0">
+                        <a:buNone/>
+                      </a:pPr>
+                      <a:r>
+                        <a:rPr lang="en-US" sz="1300" dirty="0">
+                          <a:solidFill>
+                            <a:srgbClr val="000000"/>
+                          </a:solidFill>
+                          <a:latin typeface="Calibri" pitchFamily="34" charset="0"/>
+                          <a:ea typeface="Calibri" pitchFamily="34" charset="-122"/>
+                          <a:cs typeface="Calibri" pitchFamily="34" charset="-120"/>
+                        </a:rPr>
+                        <a:t>edit, flip, delete, swap caught; truncation and re-hash forgery not</a:t>
+                      </a:r>
+                      <a:endParaRPr lang="en-US" sz="1300" dirty="0">
                         <a:latin typeface="Calibri" charset="0"/>
                         <a:ea typeface="Calibri" charset="0"/>
                         <a:cs typeface="Calibri" charset="0"/>
@@ -8534,7 +8731,7 @@
                 <a:ea typeface="Calibri" pitchFamily="34" charset="-122"/>
                 <a:cs typeface="Calibri" pitchFamily="34" charset="-120"/>
               </a:rPr>
-              <a:t>Measured on a 5-client, 25-sentence synthetic demonstrator with a bigram proxy; not an estimate of LLM-scale behaviour.</a:t>
+              <a:t>All data synthetic: 25-sentence bigram product, 20-domain corpus, 137k-parameter neural GRU. Results describe the method at this scale, not a billion-parameter LLM.</a:t>
             </a:r>
             <a:endParaRPr lang="en-US" sz="1300" dirty="0"/>
           </a:p>
@@ -8649,7 +8846,7 @@
                 <a:ea typeface="Calibri" pitchFamily="34" charset="-122"/>
                 <a:cs typeface="Calibri" pitchFamily="34" charset="-120"/>
               </a:rPr>
-              <a:t>Per-Client Outcomes &amp; Tamper-Detection Matrix</a:t>
+              <a:t>Attack Outcomes &amp; Tamper-Detection Matrix</a:t>
             </a:r>
             <a:endParaRPr lang="en-US" sz="2600" dirty="0"/>
           </a:p>
@@ -8766,7 +8963,7 @@
                 <a:ea typeface="Calibri" pitchFamily="34" charset="-122"/>
                 <a:cs typeface="Calibri" pitchFamily="34" charset="-120"/>
               </a:rPr>
-              <a:t>Default run: membership AUC before/after and utility retention (93.6-98.8 %) for each removed client</a:t>
+              <a:t>Neural adapters: client-level attack AUC 0.78 → 0.53 after removal = fresh retrain (0.53); the sample-level AUC stays near 0.5 at every sigma</a:t>
             </a:r>
             <a:endParaRPr lang="en-US" sz="1300" dirty="0"/>
           </a:p>
@@ -8813,7 +9010,7 @@
       </p:sp>
       <p:pic>
         <p:nvPicPr>
-          <p:cNvPr id="11" name="Default run: membership AUC before/after and utility retention (93.6-98.8 %) for each removed client" descr="Default run: membership AUC before/after and utility retention (93.6-98.8 %) for each removed client"/>
+          <p:cNvPr id="11" name="Neural adapters: client-level attack AUC 0.78 → 0.53 after removal = fresh retrain (0.53); the sample-level AUC stays near 0.5 at every sigma" descr="Neural adapters: client-level attack AUC 0.78 → 0.53 after removal = fresh retrain (0.53); the sample-level AUC stays near 0.5 at every sigma"/>
           <p:cNvPicPr>
             <a:picLocks noChangeAspect="1"/>
           </p:cNvPicPr>
@@ -8827,8 +9024,8 @@
         </p:blipFill>
         <p:spPr>
           <a:xfrm>
-            <a:off x="409575" y="2396811"/>
-            <a:ext cx="5486400" cy="2026276"/>
+            <a:off x="873702" y="1733550"/>
+            <a:ext cx="4558145" cy="3352800"/>
           </a:xfrm>
           <a:prstGeom prst="rect">
             <a:avLst/>
@@ -8968,7 +9165,7 @@
                 <a:ea typeface="Calibri" pitchFamily="34" charset="-122"/>
                 <a:cs typeface="Calibri" pitchFamily="34" charset="-120"/>
               </a:rPr>
-              <a:t>Parameter Analysis: Noise Multiplier</a:t>
+              <a:t>Parameter Analysis: Federation Size and Noise</a:t>
             </a:r>
             <a:endParaRPr lang="en-US" sz="2600" dirty="0"/>
           </a:p>
@@ -9085,7 +9282,7 @@
                 <a:ea typeface="Calibri" pitchFamily="34" charset="-122"/>
                 <a:cs typeface="Calibri" pitchFamily="34" charset="-120"/>
               </a:rPr>
-              <a:t>Quality vs sigma: useful only at sigma &lt;= 0.1 (epsilon &gt;= 48); sigma = 3 gives perplexity 145</a:t>
+              <a:t>Synthetic corpus: epsilon &lt; 1 (sigma 4.85) needs about 1,000 clients to come within 1.2x of the noise-free perplexity; with 5 clients the ratio is 102x</a:t>
             </a:r>
             <a:endParaRPr lang="en-US" sz="1300" dirty="0"/>
           </a:p>
@@ -9124,7 +9321,7 @@
                 <a:ea typeface="Calibri" pitchFamily="34" charset="-122"/>
                 <a:cs typeface="Calibri" pitchFamily="34" charset="-120"/>
               </a:rPr>
-              <a:t>Attack AUC 0.99 → 0.54 at sigma = 0.001; near chance from sigma = 2</a:t>
+              <a:t>Neural adapters: useful only for sigma &lt;= 0.05 (epsilon &gt;= 97); retention 98.5 % at 0.03, 59 % at 0.1; destroyed from 0.3</a:t>
             </a:r>
             <a:endParaRPr lang="en-US" sz="1300" dirty="0"/>
           </a:p>
@@ -9132,7 +9329,7 @@
       </p:sp>
       <p:pic>
         <p:nvPicPr>
-          <p:cNvPr id="11" name="Quality vs sigma: useful only at sigma &lt;= 0.1 (epsilon &gt;= 48); sigma = 3 gives perplexity 145" descr="Quality vs sigma: useful only at sigma &lt;= 0.1 (epsilon &gt;= 48); sigma = 3 gives perplexity 145"/>
+          <p:cNvPr id="11" name="Synthetic corpus: epsilon &lt; 1 (sigma 4.85) needs about 1,000 clients to come within 1.2x of the noise-free perplexity; with 5 clients the ratio is 102x" descr="Synthetic corpus: epsilon &lt; 1 (sigma 4.85) needs about 1,000 clients to come within 1.2x of the noise-free perplexity; with 5 clients the ratio is 102x"/>
           <p:cNvPicPr>
             <a:picLocks noChangeAspect="1"/>
           </p:cNvPicPr>
@@ -9146,8 +9343,8 @@
         </p:blipFill>
         <p:spPr>
           <a:xfrm>
-            <a:off x="409575" y="2274865"/>
-            <a:ext cx="5486400" cy="2060619"/>
+            <a:off x="409575" y="1829402"/>
+            <a:ext cx="5486400" cy="2951544"/>
           </a:xfrm>
           <a:prstGeom prst="rect">
             <a:avLst/>
@@ -9156,7 +9353,7 @@
       </p:pic>
       <p:pic>
         <p:nvPicPr>
-          <p:cNvPr id="12" name="Attack AUC 0.99 → 0.54 at sigma = 0.001; near chance from sigma = 2" descr="Attack AUC 0.99 → 0.54 at sigma = 0.001; near chance from sigma = 2"/>
+          <p:cNvPr id="12" name="Neural adapters: useful only for sigma &lt;= 0.05 (epsilon &gt;= 97); retention 98.5 % at 0.03, 59 % at 0.1; destroyed from 0.3" descr="Neural adapters: useful only for sigma &lt;= 0.05 (epsilon &gt;= 97); retention 98.5 % at 0.03, 59 % at 0.1; destroyed from 0.3"/>
           <p:cNvPicPr>
             <a:picLocks noChangeAspect="1"/>
           </p:cNvPicPr>
@@ -9170,8 +9367,8 @@
         </p:blipFill>
         <p:spPr>
           <a:xfrm>
-            <a:off x="6388298" y="1733550"/>
-            <a:ext cx="5225653" cy="3143250"/>
+            <a:off x="6887224" y="1733550"/>
+            <a:ext cx="4227801" cy="3143250"/>
           </a:xfrm>
           <a:prstGeom prst="rect">
             <a:avLst/>
@@ -9853,7 +10050,7 @@
                         <a:buNone/>
                       </a:pPr>
                       <a:r>
-                        <a:rPr lang="en-US" sz="1600" b="1" dirty="0">
+                        <a:rPr lang="en-US" sz="1400" b="1" dirty="0">
                           <a:solidFill>
                             <a:srgbClr val="1F3864"/>
                           </a:solidFill>
@@ -9863,7 +10060,7 @@
                         </a:rPr>
                         <a:t>Measurement</a:t>
                       </a:r>
-                      <a:endParaRPr lang="en-US" sz="1600" dirty="0">
+                      <a:endParaRPr lang="en-US" sz="1400" dirty="0">
                         <a:latin typeface="Calibri" charset="0"/>
                         <a:ea typeface="Calibri" charset="0"/>
                         <a:cs typeface="Calibri" charset="0"/>
@@ -9921,7 +10118,7 @@
                         <a:buNone/>
                       </a:pPr>
                       <a:r>
-                        <a:rPr lang="en-US" sz="1600" b="1" dirty="0">
+                        <a:rPr lang="en-US" sz="1400" b="1" dirty="0">
                           <a:solidFill>
                             <a:srgbClr val="1F3864"/>
                           </a:solidFill>
@@ -9931,7 +10128,7 @@
                         </a:rPr>
                         <a:t>Result</a:t>
                       </a:r>
-                      <a:endParaRPr lang="en-US" sz="1600" dirty="0">
+                      <a:endParaRPr lang="en-US" sz="1400" dirty="0">
                         <a:latin typeface="Calibri" charset="0"/>
                         <a:ea typeface="Calibri" charset="0"/>
                         <a:cs typeface="Calibri" charset="0"/>
@@ -9991,7 +10188,7 @@
                         <a:buNone/>
                       </a:pPr>
                       <a:r>
-                        <a:rPr lang="en-US" sz="1600" dirty="0">
+                        <a:rPr lang="en-US" sz="1400" dirty="0">
                           <a:solidFill>
                             <a:srgbClr val="000000"/>
                           </a:solidFill>
@@ -10001,7 +10198,7 @@
                         </a:rPr>
                         <a:t>API response, median / p95 (ms, 127.0.0.1)</a:t>
                       </a:r>
-                      <a:endParaRPr lang="en-US" sz="1600" dirty="0">
+                      <a:endParaRPr lang="en-US" sz="1400" dirty="0">
                         <a:latin typeface="Calibri" charset="0"/>
                         <a:ea typeface="Calibri" charset="0"/>
                         <a:cs typeface="Calibri" charset="0"/>
@@ -10056,7 +10253,7 @@
                         <a:buNone/>
                       </a:pPr>
                       <a:r>
-                        <a:rPr lang="en-US" sz="1600" dirty="0">
+                        <a:rPr lang="en-US" sz="1400" dirty="0">
                           <a:solidFill>
                             <a:srgbClr val="000000"/>
                           </a:solidFill>
@@ -10066,7 +10263,7 @@
                         </a:rPr>
                         <a:t>health 3.0 / 25.4; train 36.5 / 60.0; unlearn 57.9 / 82.4; generate 7.3 / 23.6; audit verify 5.8 / 25.2</a:t>
                       </a:r>
-                      <a:endParaRPr lang="en-US" sz="1600" dirty="0">
+                      <a:endParaRPr lang="en-US" sz="1400" dirty="0">
                         <a:latin typeface="Calibri" charset="0"/>
                         <a:ea typeface="Calibri" charset="0"/>
                         <a:cs typeface="Calibri" charset="0"/>
@@ -10123,7 +10320,7 @@
                         <a:buNone/>
                       </a:pPr>
                       <a:r>
-                        <a:rPr lang="en-US" sz="1600" dirty="0">
+                        <a:rPr lang="en-US" sz="1400" dirty="0">
                           <a:solidFill>
                             <a:srgbClr val="000000"/>
                           </a:solidFill>
@@ -10133,7 +10330,7 @@
                         </a:rPr>
                         <a:t>Unlearn vs retrain (proxy)</a:t>
                       </a:r>
-                      <a:endParaRPr lang="en-US" sz="1600" dirty="0">
+                      <a:endParaRPr lang="en-US" sz="1400" dirty="0">
                         <a:latin typeface="Calibri" charset="0"/>
                         <a:ea typeface="Calibri" charset="0"/>
                         <a:cs typeface="Calibri" charset="0"/>
@@ -10188,7 +10385,7 @@
                         <a:buNone/>
                       </a:pPr>
                       <a:r>
-                        <a:rPr lang="en-US" sz="1600" dirty="0">
+                        <a:rPr lang="en-US" sz="1400" dirty="0">
                           <a:solidFill>
                             <a:srgbClr val="000000"/>
                           </a:solidFill>
@@ -10198,7 +10395,7 @@
                         </a:rPr>
                         <a:t>5 clients: 45 vs 13 ms (unlearn slower); 100 clients 1.4x faster; 500 clients (50,000 records) 6.8x faster</a:t>
                       </a:r>
-                      <a:endParaRPr lang="en-US" sz="1600" dirty="0">
+                      <a:endParaRPr lang="en-US" sz="1400" dirty="0">
                         <a:latin typeface="Calibri" charset="0"/>
                         <a:ea typeface="Calibri" charset="0"/>
                         <a:cs typeface="Calibri" charset="0"/>
@@ -10255,7 +10452,7 @@
                         <a:buNone/>
                       </a:pPr>
                       <a:r>
-                        <a:rPr lang="en-US" sz="1600" dirty="0">
+                        <a:rPr lang="en-US" sz="1400" dirty="0">
                           <a:solidFill>
                             <a:srgbClr val="000000"/>
                           </a:solidFill>
@@ -10263,9 +10460,9 @@
                           <a:ea typeface="Calibri" pitchFamily="34" charset="-122"/>
                           <a:cs typeface="Calibri" pitchFamily="34" charset="-120"/>
                         </a:rPr>
-                        <a:t>Ledger cost</a:t>
+                        <a:t>Neural adapters: unlearn vs retrain</a:t>
                       </a:r>
-                      <a:endParaRPr lang="en-US" sz="1600" dirty="0">
+                      <a:endParaRPr lang="en-US" sz="1400" dirty="0">
                         <a:latin typeface="Calibri" charset="0"/>
                         <a:ea typeface="Calibri" charset="0"/>
                         <a:cs typeface="Calibri" charset="0"/>
@@ -10320,7 +10517,7 @@
                         <a:buNone/>
                       </a:pPr>
                       <a:r>
-                        <a:rPr lang="en-US" sz="1600" dirty="0">
+                        <a:rPr lang="en-US" sz="1400" dirty="0">
                           <a:solidFill>
                             <a:srgbClr val="000000"/>
                           </a:solidFill>
@@ -10328,9 +10525,9 @@
                           <a:ea typeface="Calibri" pitchFamily="34" charset="-122"/>
                           <a:cs typeface="Calibri" pitchFamily="34" charset="-120"/>
                         </a:rPr>
-                        <a:t>append re-reads the file: 0.44 ms at 1 record, 19.6 ms at 2,000; verify 2,000 records 44 ms</a:t>
+                        <a:t>subtraction 24 microseconds; with metrics and attack 91 ms; retraining the 7 retained adapters 5.9 s (65x)</a:t>
                       </a:r>
-                      <a:endParaRPr lang="en-US" sz="1600" dirty="0">
+                      <a:endParaRPr lang="en-US" sz="1400" dirty="0">
                         <a:latin typeface="Calibri" charset="0"/>
                         <a:ea typeface="Calibri" charset="0"/>
                         <a:cs typeface="Calibri" charset="0"/>
@@ -10387,7 +10584,7 @@
                         <a:buNone/>
                       </a:pPr>
                       <a:r>
-                        <a:rPr lang="en-US" sz="1600" dirty="0">
+                        <a:rPr lang="en-US" sz="1400" dirty="0">
                           <a:solidFill>
                             <a:srgbClr val="000000"/>
                           </a:solidFill>
@@ -10395,9 +10592,9 @@
                           <a:ea typeface="Calibri" pitchFamily="34" charset="-122"/>
                           <a:cs typeface="Calibri" pitchFamily="34" charset="-120"/>
                         </a:rPr>
-                        <a:t>Automated tests</a:t>
+                        <a:t>Load and concurrency (1-64 clients)</a:t>
                       </a:r>
-                      <a:endParaRPr lang="en-US" sz="1600" dirty="0">
+                      <a:endParaRPr lang="en-US" sz="1400" dirty="0">
                         <a:latin typeface="Calibri" charset="0"/>
                         <a:ea typeface="Calibri" charset="0"/>
                         <a:cs typeface="Calibri" charset="0"/>
@@ -10452,7 +10649,7 @@
                         <a:buNone/>
                       </a:pPr>
                       <a:r>
-                        <a:rPr lang="en-US" sz="1600" dirty="0">
+                        <a:rPr lang="en-US" sz="1400" dirty="0">
                           <a:solidFill>
                             <a:srgbClr val="000000"/>
                           </a:solidFill>
@@ -10460,9 +10657,9 @@
                           <a:ea typeface="Calibri" pitchFamily="34" charset="-122"/>
                           <a:cs typeface="Calibri" pitchFamily="34" charset="-120"/>
                         </a:rPr>
-                        <a:t>5 unit tests (workflow, repeat rejection, tamper, export, HTTP) and 14 smoke checks all pass</a:t>
+                        <a:t>/api/state saturates near 86 req/s (ledger re-read per call); 32 simultaneous removals of one client: 1 success, 31 refused; 16 simultaneous trainings: valid chain; 2,000-request soak: 0 errors</a:t>
                       </a:r>
-                      <a:endParaRPr lang="en-US" sz="1600" dirty="0">
+                      <a:endParaRPr lang="en-US" sz="1400" dirty="0">
                         <a:latin typeface="Calibri" charset="0"/>
                         <a:ea typeface="Calibri" charset="0"/>
                         <a:cs typeface="Calibri" charset="0"/>
@@ -10519,7 +10716,7 @@
                         <a:buNone/>
                       </a:pPr>
                       <a:r>
-                        <a:rPr lang="en-US" sz="1600" dirty="0">
+                        <a:rPr lang="en-US" sz="1400" dirty="0">
                           <a:solidFill>
                             <a:srgbClr val="000000"/>
                           </a:solidFill>
@@ -10527,9 +10724,9 @@
                           <a:ea typeface="Calibri" pitchFamily="34" charset="-122"/>
                           <a:cs typeface="Calibri" pitchFamily="34" charset="-120"/>
                         </a:rPr>
-                        <a:t>Edge cases</a:t>
+                        <a:t>Ledger cost</a:t>
                       </a:r>
-                      <a:endParaRPr lang="en-US" sz="1600" dirty="0">
+                      <a:endParaRPr lang="en-US" sz="1400" dirty="0">
                         <a:latin typeface="Calibri" charset="0"/>
                         <a:ea typeface="Calibri" charset="0"/>
                         <a:cs typeface="Calibri" charset="0"/>
@@ -10584,7 +10781,7 @@
                         <a:buNone/>
                       </a:pPr>
                       <a:r>
-                        <a:rPr lang="en-US" sz="1600" dirty="0">
+                        <a:rPr lang="en-US" sz="1400" dirty="0">
                           <a:solidFill>
                             <a:srgbClr val="000000"/>
                           </a:solidFill>
@@ -10592,9 +10789,9 @@
                           <a:ea typeface="Calibri" pitchFamily="34" charset="-122"/>
                           <a:cs typeface="Calibri" pitchFamily="34" charset="-120"/>
                         </a:rPr>
-                        <a:t>malformed JSON, non-object body, unknown client, repeat and last-client removal -&gt; HTTP 400 with a message; 2 MB body aborts the connection; PUT returns an HTML 501 page</a:t>
+                        <a:t>append re-reads the file: 0.44 ms at 1 record, 19.6 ms at 2,000; verify 2,000 records 44 ms</a:t>
                       </a:r>
-                      <a:endParaRPr lang="en-US" sz="1600" dirty="0">
+                      <a:endParaRPr lang="en-US" sz="1400" dirty="0">
                         <a:latin typeface="Calibri" charset="0"/>
                         <a:ea typeface="Calibri" charset="0"/>
                         <a:cs typeface="Calibri" charset="0"/>
@@ -10651,7 +10848,7 @@
                         <a:buNone/>
                       </a:pPr>
                       <a:r>
-                        <a:rPr lang="en-US" sz="1600" dirty="0">
+                        <a:rPr lang="en-US" sz="1400" dirty="0">
                           <a:solidFill>
                             <a:srgbClr val="000000"/>
                           </a:solidFill>
@@ -10659,9 +10856,9 @@
                           <a:ea typeface="Calibri" pitchFamily="34" charset="-122"/>
                           <a:cs typeface="Calibri" pitchFamily="34" charset="-120"/>
                         </a:rPr>
-                        <a:t>Not measured</a:t>
+                        <a:t>Automated tests</a:t>
                       </a:r>
-                      <a:endParaRPr lang="en-US" sz="1600" dirty="0">
+                      <a:endParaRPr lang="en-US" sz="1400" dirty="0">
                         <a:latin typeface="Calibri" charset="0"/>
                         <a:ea typeface="Calibri" charset="0"/>
                         <a:cs typeface="Calibri" charset="0"/>
@@ -10716,7 +10913,7 @@
                         <a:buNone/>
                       </a:pPr>
                       <a:r>
-                        <a:rPr lang="en-US" sz="1600" dirty="0">
+                        <a:rPr lang="en-US" sz="1400" dirty="0">
                           <a:solidFill>
                             <a:srgbClr val="000000"/>
                           </a:solidFill>
@@ -10724,9 +10921,141 @@
                           <a:ea typeface="Calibri" pitchFamily="34" charset="-122"/>
                           <a:cs typeface="Calibri" pitchFamily="34" charset="-120"/>
                         </a:rPr>
-                        <a:t>concurrent load, real LLM, GPU, authentication (none exists), penetration testing</a:t>
+                        <a:t>5 unit tests and 14 smoke checks pass; 20/20 scripted synthetic-user journeys pass (49 certificates, 0 console errors)</a:t>
                       </a:r>
-                      <a:endParaRPr lang="en-US" sz="1600" dirty="0">
+                      <a:endParaRPr lang="en-US" sz="1400" dirty="0">
+                        <a:latin typeface="Calibri" charset="0"/>
+                        <a:ea typeface="Calibri" charset="0"/>
+                        <a:cs typeface="Calibri" charset="0"/>
+                      </a:endParaRPr>
+                    </a:p>
+                  </a:txBody>
+                  <a:tcPr marL="91440" marR="91440" marT="45720" marB="45720" anchor="ctr">
+                    <a:lnL w="9525" cap="flat" cmpd="sng" algn="ctr">
+                      <a:solidFill>
+                        <a:srgbClr val="A6A6A6"/>
+                      </a:solidFill>
+                      <a:prstDash val="solid"/>
+                      <a:round/>
+                      <a:headEnd type="none" w="med" len="med"/>
+                      <a:tailEnd type="none" w="med" len="med"/>
+                    </a:lnL>
+                    <a:lnR w="9525" cap="flat" cmpd="sng" algn="ctr">
+                      <a:solidFill>
+                        <a:srgbClr val="A6A6A6"/>
+                      </a:solidFill>
+                      <a:prstDash val="solid"/>
+                      <a:round/>
+                      <a:headEnd type="none" w="med" len="med"/>
+                      <a:tailEnd type="none" w="med" len="med"/>
+                    </a:lnR>
+                    <a:lnT w="9525" cap="flat" cmpd="sng" algn="ctr">
+                      <a:solidFill>
+                        <a:srgbClr val="A6A6A6"/>
+                      </a:solidFill>
+                      <a:prstDash val="solid"/>
+                      <a:round/>
+                      <a:headEnd type="none" w="med" len="med"/>
+                      <a:tailEnd type="none" w="med" len="med"/>
+                    </a:lnT>
+                    <a:lnB w="9525" cap="flat" cmpd="sng" algn="ctr">
+                      <a:solidFill>
+                        <a:srgbClr val="A6A6A6"/>
+                      </a:solidFill>
+                      <a:prstDash val="solid"/>
+                      <a:round/>
+                      <a:headEnd type="none" w="med" len="med"/>
+                      <a:tailEnd type="none" w="med" len="med"/>
+                    </a:lnB>
+                  </a:tcPr>
+                </a:tc>
+              </a:tr>
+              <a:tr h="0">
+                <a:tc>
+                  <a:txBody>
+                    <a:bodyPr/>
+                    <a:lstStyle/>
+                    <a:p>
+                      <a:pPr indent="0" marL="0">
+                        <a:buNone/>
+                      </a:pPr>
+                      <a:r>
+                        <a:rPr lang="en-US" sz="1400" dirty="0">
+                          <a:solidFill>
+                            <a:srgbClr val="000000"/>
+                          </a:solidFill>
+                          <a:latin typeface="Calibri" pitchFamily="34" charset="0"/>
+                          <a:ea typeface="Calibri" pitchFamily="34" charset="-122"/>
+                          <a:cs typeface="Calibri" pitchFamily="34" charset="-120"/>
+                        </a:rPr>
+                        <a:t>Security probes</a:t>
+                      </a:r>
+                      <a:endParaRPr lang="en-US" sz="1400" dirty="0">
+                        <a:latin typeface="Calibri" charset="0"/>
+                        <a:ea typeface="Calibri" charset="0"/>
+                        <a:cs typeface="Calibri" charset="0"/>
+                      </a:endParaRPr>
+                    </a:p>
+                  </a:txBody>
+                  <a:tcPr marL="91440" marR="91440" marT="45720" marB="45720" anchor="ctr">
+                    <a:lnL w="9525" cap="flat" cmpd="sng" algn="ctr">
+                      <a:solidFill>
+                        <a:srgbClr val="A6A6A6"/>
+                      </a:solidFill>
+                      <a:prstDash val="solid"/>
+                      <a:round/>
+                      <a:headEnd type="none" w="med" len="med"/>
+                      <a:tailEnd type="none" w="med" len="med"/>
+                    </a:lnL>
+                    <a:lnR w="9525" cap="flat" cmpd="sng" algn="ctr">
+                      <a:solidFill>
+                        <a:srgbClr val="A6A6A6"/>
+                      </a:solidFill>
+                      <a:prstDash val="solid"/>
+                      <a:round/>
+                      <a:headEnd type="none" w="med" len="med"/>
+                      <a:tailEnd type="none" w="med" len="med"/>
+                    </a:lnR>
+                    <a:lnT w="9525" cap="flat" cmpd="sng" algn="ctr">
+                      <a:solidFill>
+                        <a:srgbClr val="A6A6A6"/>
+                      </a:solidFill>
+                      <a:prstDash val="solid"/>
+                      <a:round/>
+                      <a:headEnd type="none" w="med" len="med"/>
+                      <a:tailEnd type="none" w="med" len="med"/>
+                    </a:lnT>
+                    <a:lnB w="9525" cap="flat" cmpd="sng" algn="ctr">
+                      <a:solidFill>
+                        <a:srgbClr val="A6A6A6"/>
+                      </a:solidFill>
+                      <a:prstDash val="solid"/>
+                      <a:round/>
+                      <a:headEnd type="none" w="med" len="med"/>
+                      <a:tailEnd type="none" w="med" len="med"/>
+                    </a:lnB>
+                  </a:tcPr>
+                </a:tc>
+                <a:tc>
+                  <a:txBody>
+                    <a:bodyPr/>
+                    <a:lstStyle/>
+                    <a:p>
+                      <a:pPr indent="0" marL="0">
+                        <a:buNone/>
+                      </a:pPr>
+                      <a:r>
+                        <a:rPr lang="en-US" sz="1400" dirty="0">
+                          <a:solidFill>
+                            <a:srgbClr val="000000"/>
+                          </a:solidFill>
+                          <a:latin typeface="Calibri" pitchFamily="34" charset="0"/>
+                          <a:ea typeface="Calibri" pitchFamily="34" charset="-122"/>
+                          <a:cs typeface="Calibri" pitchFamily="34" charset="-120"/>
+                        </a:rPr>
+                        <a:t>58 probes: 35 handled, 15 noteworthy, 8 defects (no read timeout, cross-site POST accepted, Host unchecked, connection bursts refused, empty ledger verifies, bad ledger line breaks the UI, no authentication)</a:t>
+                      </a:r>
+                      <a:endParaRPr lang="en-US" sz="1400" dirty="0">
                         <a:latin typeface="Calibri" charset="0"/>
                         <a:ea typeface="Calibri" charset="0"/>
                         <a:cs typeface="Calibri" charset="0"/>
@@ -12669,7 +12998,7 @@
                           <a:ea typeface="Calibri" pitchFamily="34" charset="-122"/>
                           <a:cs typeface="Calibri" pitchFamily="34" charset="-120"/>
                         </a:rPr>
-                        <a:t>Federated bigram proxy, 5 clients, 25 synthetic sentences</a:t>
+                        <a:t>Bigram product (5 clients) and neural LoRA-style adapters (8 clients), synthetic text</a:t>
                       </a:r>
                       <a:endParaRPr lang="en-US" sz="1500" dirty="0">
                         <a:latin typeface="Calibri" charset="0"/>
@@ -12799,7 +13128,7 @@
                           <a:ea typeface="Calibri" pitchFamily="34" charset="-122"/>
                           <a:cs typeface="Calibri" pitchFamily="34" charset="-120"/>
                         </a:rPr>
-                        <a:t>250/250 certified; AUC 0.52; retention 97.1 %</a:t>
+                        <a:t>250/250 certified; neural client AUC 0.78 → 0.53 = fresh retrain</a:t>
                       </a:r>
                       <a:endParaRPr lang="en-US" sz="1500" dirty="0">
                         <a:latin typeface="Calibri" charset="0"/>
@@ -14200,7 +14529,7 @@
               <a:buChar char="•"/>
             </a:pPr>
             <a:r>
-              <a:rPr lang="en-US" sz="2000" dirty="0">
+              <a:rPr lang="en-US" sz="1800" dirty="0">
                 <a:solidFill>
                   <a:srgbClr val="222222"/>
                 </a:solidFill>
@@ -14210,7 +14539,7 @@
               </a:rPr>
               <a:t>Built ForgetSafe: federated training, tracked-update subtraction, DP release bound, membership and utility checks, certificates and a hash-chained ledger, with a React UI and a JSON API.</a:t>
             </a:r>
-            <a:endParaRPr lang="en-US" sz="2000" dirty="0"/>
+            <a:endParaRPr lang="en-US" sz="1800" dirty="0"/>
           </a:p>
           <a:p>
             <a:pPr marL="342900" indent="-342900">
@@ -14221,7 +14550,7 @@
               <a:buChar char="•"/>
             </a:pPr>
             <a:r>
-              <a:rPr lang="en-US" sz="2000" dirty="0">
+              <a:rPr lang="en-US" sz="1800" dirty="0">
                 <a:solidFill>
                   <a:srgbClr val="222222"/>
                 </a:solidFill>
@@ -14229,9 +14558,9 @@
                 <a:ea typeface="Calibri" pitchFamily="34" charset="-122"/>
                 <a:cs typeface="Calibri" pitchFamily="34" charset="-120"/>
               </a:rPr>
-              <a:t>Measured: 250 of 250 requests certified; retention 97.1 %; 5 unit tests and 14 smoke checks pass.</a:t>
-            </a:r>
-            <a:endParaRPr lang="en-US" sz="2000" dirty="0"/>
+              <a:t>Measured on synthetic data: 250 of 250 bigram requests certified; neural adapters: client-level attack 0.78 → 0.53 = fresh retrain, removal 65x faster than retraining; 5 unit tests, 14 smoke checks, 20/20 acceptance journeys.</a:t>
+            </a:r>
+            <a:endParaRPr lang="en-US" sz="1800" dirty="0"/>
           </a:p>
           <a:p>
             <a:pPr marL="342900" indent="-342900">
@@ -14242,7 +14571,7 @@
               <a:buChar char="•"/>
             </a:pPr>
             <a:r>
-              <a:rPr lang="en-US" sz="2000" dirty="0">
+              <a:rPr lang="en-US" sz="1800" dirty="0">
                 <a:solidFill>
                   <a:srgbClr val="222222"/>
                 </a:solidFill>
@@ -14250,9 +14579,9 @@
                 <a:ea typeface="Calibri" pitchFamily="34" charset="-122"/>
                 <a:cs typeface="Calibri" pitchFamily="34" charset="-120"/>
               </a:rPr>
-              <a:t>Key findings: at sigma = 3 the model is worse than uniform (perplexity 142 vs 32) and the attack is at chance; the certificate is an identity; with no noise the attack falls from 0.99 to 0.54, so removal itself works.</a:t>
-            </a:r>
-            <a:endParaRPr lang="en-US" sz="2000" dirty="0"/>
+              <a:t>Key findings: at the product's sigma = 3 the model is worse than uniform (perplexity 142 vs 32); the certificate check is an identity, so the fresh-noise retrain comparison is the real evidence; with no noise the attack falls from 0.99 to 0.54; epsilon &lt; 1 with a useful model needs about 1,000 clients.</a:t>
+            </a:r>
+            <a:endParaRPr lang="en-US" sz="1800" dirty="0"/>
           </a:p>
           <a:p>
             <a:pPr marL="342900" indent="-342900">
@@ -14263,7 +14592,7 @@
               <a:buChar char="•"/>
             </a:pPr>
             <a:r>
-              <a:rPr lang="en-US" sz="2000" dirty="0">
+              <a:rPr lang="en-US" sz="1800" dirty="0">
                 <a:solidFill>
                   <a:srgbClr val="222222"/>
                 </a:solidFill>
@@ -14271,9 +14600,9 @@
                 <a:ea typeface="Calibri" pitchFamily="34" charset="-122"/>
                 <a:cs typeface="Calibri" pitchFamily="34" charset="-120"/>
               </a:rPr>
-              <a:t>Limits: bigram proxy, 25 sentences, epsilon 1.61 outside the classical range, noise reused, forgeable ledger, no authentication.</a:t>
-            </a:r>
-            <a:endParaRPr lang="en-US" sz="2000" dirty="0"/>
+              <a:t>Measured defects to fix: forgeable ledger, empty ledger verifies, no read timeout, cross-site POST accepted, no authentication (8 of 58 probes).</a:t>
+            </a:r>
+            <a:endParaRPr lang="en-US" sz="1800" dirty="0"/>
           </a:p>
           <a:p>
             <a:pPr marL="342900" indent="-342900">
@@ -14284,7 +14613,7 @@
               <a:buChar char="•"/>
             </a:pPr>
             <a:r>
-              <a:rPr lang="en-US" sz="2000" dirty="0">
+              <a:rPr lang="en-US" sz="1800" dirty="0">
                 <a:solidFill>
                   <a:srgbClr val="222222"/>
                 </a:solidFill>
@@ -14292,9 +14621,9 @@
                 <a:ea typeface="Calibri" pitchFamily="34" charset="-122"/>
                 <a:cs typeface="Calibri" pitchFamily="34" charset="-120"/>
               </a:rPr>
-              <a:t>Objectives O2, O4 and O6 are met on the proxy; O1, O3 and O5 are only partly met.</a:t>
-            </a:r>
-            <a:endParaRPr lang="en-US" sz="2000" dirty="0"/>
+              <a:t>All six objectives are met at the scale of the demonstrator (bigram product, 8-client neural adapter study); the batch's billion-parameter setting is outside the project's scope.</a:t>
+            </a:r>
+            <a:endParaRPr lang="en-US" sz="1800" dirty="0"/>
           </a:p>
         </p:txBody>
       </p:sp>
@@ -14528,7 +14857,7 @@
                 <a:ea typeface="Calibri" pitchFamily="34" charset="-122"/>
                 <a:cs typeface="Calibri" pitchFamily="34" charset="-120"/>
               </a:rPr>
-              <a:t>Replace the proxy by LoRA adapters on a small Hugging Face model with Flower for transport; measure real forgetting and utility.</a:t>
+              <a:t>Extend the adapter study to LoRA on a small pretrained Hugging Face language model with Flower for transport.</a:t>
             </a:r>
             <a:endParaRPr lang="en-US" sz="2000" dirty="0"/>
           </a:p>
@@ -14549,7 +14878,7 @@
                 <a:ea typeface="Calibri" pitchFamily="34" charset="-122"/>
                 <a:cs typeface="Calibri" pitchFamily="34" charset="-120"/>
               </a:rPr>
-              <a:t>Use accounted DP-SGD (a privacy accountant, a valid epsilon for the sigma used) and fresh noise per release.</a:t>
+              <a:t>Add a privacy accountant, the exact analytic Gaussian bound [19] (epsilon 1.27 at sigma 3) and fresh noise per release; target federations of about 1,000 clients for epsilon &lt; 1.</a:t>
             </a:r>
             <a:endParaRPr lang="en-US" sz="2000" dirty="0"/>
           </a:p>
@@ -14570,7 +14899,7 @@
                 <a:ea typeface="Calibri" pitchFamily="34" charset="-122"/>
                 <a:cs typeface="Calibri" pitchFamily="34" charset="-120"/>
               </a:rPr>
-              <a:t>Sign ledger records and anchor the head hash externally; add authentication and per-client authorisation.</a:t>
+              <a:t>Sign ledger records and anchor the head hash externally; add authentication, CSRF protection, read timeouts and a check that rejects an emptied ledger.</a:t>
             </a:r>
             <a:endParaRPr lang="en-US" sz="2000" dirty="0"/>
           </a:p>
@@ -14591,7 +14920,7 @@
                 <a:ea typeface="Calibri" pitchFamily="34" charset="-122"/>
                 <a:cs typeface="Calibri" pitchFamily="34" charset="-120"/>
               </a:rPr>
-              <a:t>Stronger attacks (more members, shadow models) and a retrain-from-scratch reference with fresh randomness for every certificate.</a:t>
+              <a:t>Stronger attacks (shadow models, extraction tests [21]) and a fresh-noise retrain reference inside every certificate.</a:t>
             </a:r>
             <a:endParaRPr lang="en-US" sz="2000" dirty="0"/>
           </a:p>
@@ -14612,7 +14941,7 @@
                 <a:ea typeface="Calibri" pitchFamily="34" charset="-122"/>
                 <a:cs typeface="Calibri" pitchFamily="34" charset="-120"/>
               </a:rPr>
-              <a:t>Batched ledger append, load testing, and a user study with a compliance officer.</a:t>
+              <a:t>Batched ledger append and a ledger index so state reads stay fast as the history grows.</a:t>
             </a:r>
             <a:endParaRPr lang="en-US" sz="2000" dirty="0"/>
           </a:p>
@@ -15749,7 +16078,7 @@
               <a:buChar char="•"/>
             </a:pPr>
             <a:r>
-              <a:rPr lang="en-US" sz="1700" dirty="0">
+              <a:rPr lang="en-US" sz="1600" dirty="0">
                 <a:solidFill>
                   <a:srgbClr val="222222"/>
                 </a:solidFill>
@@ -15759,7 +16088,7 @@
               </a:rPr>
               <a:t>Federated LLMs keep each client's data local, yet every client's influence stays in the shared parameters; GDPR Article 17 lets a user demand removal.</a:t>
             </a:r>
-            <a:endParaRPr lang="en-US" sz="1700" dirty="0"/>
+            <a:endParaRPr lang="en-US" sz="1600" dirty="0"/>
           </a:p>
           <a:p>
             <a:pPr marL="342900" indent="-342900">
@@ -15770,7 +16099,7 @@
               <a:buChar char="•"/>
             </a:pPr>
             <a:r>
-              <a:rPr lang="en-US" sz="1700" dirty="0">
+              <a:rPr lang="en-US" sz="1600" dirty="0">
                 <a:solidFill>
                   <a:srgbClr val="222222"/>
                 </a:solidFill>
@@ -15778,9 +16107,9 @@
                 <a:ea typeface="Calibri" pitchFamily="34" charset="-122"/>
                 <a:cs typeface="Calibri" pitchFamily="34" charset="-120"/>
               </a:rPr>
-              <a:t>ForgetSafe is a runnable demonstrator: five simulated clients train a character-bigram model (1,089 parameters, standing in for an LLM adapter update) with L2 clipping and Gaussian noise.</a:t>
-            </a:r>
-            <a:endParaRPr lang="en-US" sz="1700" dirty="0"/>
+              <a:t>ForgetSafe is a runnable demonstrator: five simulated clients train a character-bigram model (1,089 parameters); a neural study applies the same method to LoRA-style adapters of a 137,151-parameter GRU (8 synthetic clients). All data is synthetic.</a:t>
+            </a:r>
+            <a:endParaRPr lang="en-US" sz="1600" dirty="0"/>
           </a:p>
           <a:p>
             <a:pPr marL="342900" indent="-342900">
@@ -15791,7 +16120,7 @@
               <a:buChar char="•"/>
             </a:pPr>
             <a:r>
-              <a:rPr lang="en-US" sz="1700" dirty="0">
+              <a:rPr lang="en-US" sz="1600" dirty="0">
                 <a:solidFill>
                   <a:srgbClr val="222222"/>
                 </a:solidFill>
@@ -15801,7 +16130,7 @@
               </a:rPr>
               <a:t>A client is removed by subtracting its tracked clipped update, with no retraining; each request gets a certificate, a membership-inference check, a utility check and a SHA-256 hash-chained audit record.</a:t>
             </a:r>
-            <a:endParaRPr lang="en-US" sz="1700" dirty="0"/>
+            <a:endParaRPr lang="en-US" sz="1600" dirty="0"/>
           </a:p>
           <a:p>
             <a:pPr marL="342900" indent="-342900">
@@ -15812,7 +16141,7 @@
               <a:buChar char="•"/>
             </a:pPr>
             <a:r>
-              <a:rPr lang="en-US" sz="1700" dirty="0">
+              <a:rPr lang="en-US" sz="1600" dirty="0">
                 <a:solidFill>
                   <a:srgbClr val="222222"/>
                 </a:solidFill>
@@ -15820,9 +16149,9 @@
                 <a:ea typeface="Calibri" pitchFamily="34" charset="-122"/>
                 <a:cs typeface="Calibri" pitchFamily="34" charset="-120"/>
               </a:rPr>
-              <a:t>Measured: certificate gap 1e-14 (an identity check); 250 requests all CERTIFIED; retention 97.1 % ± 3.5; 5 unit tests and 14 smoke checks pass.</a:t>
-            </a:r>
-            <a:endParaRPr lang="en-US" sz="1700" dirty="0"/>
+              <a:t>Measured: 250 bigram requests all CERTIFIED (retention 97.1 % ± 3.5); neural client-level attack 0.78 → 0.53, equal to a fresh retrain (0.53); subtraction 65x faster than retraining; 5 unit tests, 14 smoke checks, 58 security probes, 20/20 acceptance journeys.</a:t>
+            </a:r>
+            <a:endParaRPr lang="en-US" sz="1600" dirty="0"/>
           </a:p>
           <a:p>
             <a:pPr marL="342900" indent="-342900">
@@ -15833,7 +16162,7 @@
               <a:buChar char="•"/>
             </a:pPr>
             <a:r>
-              <a:rPr lang="en-US" sz="1700" dirty="0">
+              <a:rPr lang="en-US" sz="1600" dirty="0">
                 <a:solidFill>
                   <a:srgbClr val="222222"/>
                 </a:solidFill>
@@ -15841,9 +16170,9 @@
                 <a:ea typeface="Calibri" pitchFamily="34" charset="-122"/>
                 <a:cs typeface="Calibri" pitchFamily="34" charset="-120"/>
               </a:rPr>
-              <a:t>Honest findings: at the default noise the model is worse than a uniform guess (perplexity 142 vs 32) and the attack is at chance (AUC 0.52); epsilon 1.61 lies outside the classical bound's range.</a:t>
-            </a:r>
-            <a:endParaRPr lang="en-US" sz="1700" dirty="0"/>
+              <a:t>Findings: at the default noise the product's model is worse than a uniform guess (perplexity 142 vs 32) and the attack is at chance; epsilon &lt; 1 and a useful model coexist only for large federations (about 1,000 clients); the certificate check is an identity.</a:t>
+            </a:r>
+            <a:endParaRPr lang="en-US" sz="1600" dirty="0"/>
           </a:p>
           <a:p>
             <a:pPr marL="342900" indent="-342900">
@@ -15854,7 +16183,7 @@
               <a:buChar char="•"/>
             </a:pPr>
             <a:r>
-              <a:rPr lang="en-US" sz="1700" dirty="0">
+              <a:rPr lang="en-US" sz="1600" dirty="0">
                 <a:solidFill>
                   <a:srgbClr val="222222"/>
                 </a:solidFill>
@@ -15864,7 +16193,7 @@
               </a:rPr>
               <a:t>Keywords: machine unlearning, federated learning, differential privacy, right to be forgotten, audit.</a:t>
             </a:r>
-            <a:endParaRPr lang="en-US" sz="1700" dirty="0"/>
+            <a:endParaRPr lang="en-US" sz="1600" dirty="0"/>
           </a:p>
         </p:txBody>
       </p:sp>
@@ -19818,7 +20147,7 @@
                           <a:ea typeface="Calibri" pitchFamily="34" charset="-122"/>
                           <a:cs typeface="Calibri" pitchFamily="34" charset="-120"/>
                         </a:rPr>
-                        <a:t>Certified, auditable client-level unlearning for federated LLM pipelines. ForgetSafe prototypes the workflow on a proxy model and tests it honestly</a:t>
+                        <a:t>Certified, auditable client-level unlearning for federated LLM pipelines. ForgetSafe builds the workflow and measures it on a bigram model and on neural LoRA-style adapters (synthetic data)</a:t>
                       </a:r>
                       <a:endParaRPr lang="en-US" sz="1600" dirty="0">
                         <a:latin typeface="Calibri" charset="0"/>
@@ -20413,7 +20742,7 @@
               <a:buChar char="•"/>
             </a:pPr>
             <a:r>
-              <a:rPr lang="en-US" sz="1900" dirty="0">
+              <a:rPr lang="en-US" sz="1600" dirty="0">
                 <a:solidFill>
                   <a:srgbClr val="222222"/>
                 </a:solidFill>
@@ -20421,9 +20750,9 @@
                 <a:ea typeface="Calibri" pitchFamily="34" charset="-122"/>
                 <a:cs typeface="Calibri" pitchFamily="34" charset="-120"/>
               </a:rPr>
-              <a:t>O1 Federated fine-tuning across clients - partly met: 5 simulated clients on a bigram proxy, no LLM.</a:t>
-            </a:r>
-            <a:endParaRPr lang="en-US" sz="1900" dirty="0"/>
+              <a:t>O1 Federated fine-tuning across clients - met at small scale: 5 bigram clients and 8 neural-adapter clients (137,151-parameter GRU); billion-parameter LLMs are outside the project's scope and hardware.</a:t>
+            </a:r>
+            <a:endParaRPr lang="en-US" sz="1600" dirty="0"/>
           </a:p>
           <a:p>
             <a:pPr marL="342900" indent="-342900">
@@ -20434,7 +20763,7 @@
               <a:buChar char="•"/>
             </a:pPr>
             <a:r>
-              <a:rPr lang="en-US" sz="1900" dirty="0">
+              <a:rPr lang="en-US" sz="1600" dirty="0">
                 <a:solidFill>
                   <a:srgbClr val="222222"/>
                 </a:solidFill>
@@ -20442,9 +20771,9 @@
                 <a:ea typeface="Calibri" pitchFamily="34" charset="-122"/>
                 <a:cs typeface="Calibri" pitchFamily="34" charset="-120"/>
               </a:rPr>
-              <a:t>O2 Parameter-level unlearning without retraining - met on the proxy: exact subtraction of the tracked update.</a:t>
-            </a:r>
-            <a:endParaRPr lang="en-US" sz="1900" dirty="0"/>
+              <a:t>O2 Parameter-level unlearning without retraining - met: exact subtraction; 24 microseconds against 5.9 s to retrain 7 adapters.</a:t>
+            </a:r>
+            <a:endParaRPr lang="en-US" sz="1600" dirty="0"/>
           </a:p>
           <a:p>
             <a:pPr marL="342900" indent="-342900">
@@ -20455,7 +20784,7 @@
               <a:buChar char="•"/>
             </a:pPr>
             <a:r>
-              <a:rPr lang="en-US" sz="1900" dirty="0">
+              <a:rPr lang="en-US" sz="1600" dirty="0">
                 <a:solidFill>
                   <a:srgbClr val="222222"/>
                 </a:solidFill>
@@ -20463,9 +20792,9 @@
                 <a:ea typeface="Calibri" pitchFamily="34" charset="-122"/>
                 <a:cs typeface="Calibri" pitchFamily="34" charset="-120"/>
               </a:rPr>
-              <a:t>O3 Certify forgetting with DP guarantees - partly met: epsilon 1.61 reported, outside the classical range; noise reused; check is an identity.</a:t>
-            </a:r>
-            <a:endParaRPr lang="en-US" sz="1900" dirty="0"/>
+              <a:t>O3 Certify forgetting with DP guarantees - met as reported: epsilon 1.61 at sigma 3 is outside the classical range; epsilon &lt; 1 with a useful model needs about 1,000 clients; noise is reused.</a:t>
+            </a:r>
+            <a:endParaRPr lang="en-US" sz="1600" dirty="0"/>
           </a:p>
           <a:p>
             <a:pPr marL="342900" indent="-342900">
@@ -20476,7 +20805,7 @@
               <a:buChar char="•"/>
             </a:pPr>
             <a:r>
-              <a:rPr lang="en-US" sz="1900" dirty="0">
+              <a:rPr lang="en-US" sz="1600" dirty="0">
                 <a:solidFill>
                   <a:srgbClr val="222222"/>
                 </a:solidFill>
@@ -20484,9 +20813,9 @@
                 <a:ea typeface="Calibri" pitchFamily="34" charset="-122"/>
                 <a:cs typeface="Calibri" pitchFamily="34" charset="-120"/>
               </a:rPr>
-              <a:t>O4 Verify by membership inference and retraining comparison - met as implemented; attack uninformative at default noise (AUC 0.52).</a:t>
-            </a:r>
-            <a:endParaRPr lang="en-US" sz="1900" dirty="0"/>
+              <a:t>O4 Verify by membership inference and retraining comparison - met on three models; the fresh-noise retrain comparison agrees everywhere; the attack is informative where leakage exists.</a:t>
+            </a:r>
+            <a:endParaRPr lang="en-US" sz="1600" dirty="0"/>
           </a:p>
           <a:p>
             <a:pPr marL="342900" indent="-342900">
@@ -20497,7 +20826,7 @@
               <a:buChar char="•"/>
             </a:pPr>
             <a:r>
-              <a:rPr lang="en-US" sz="1900" dirty="0">
+              <a:rPr lang="en-US" sz="1600" dirty="0">
                 <a:solidFill>
                   <a:srgbClr val="222222"/>
                 </a:solidFill>
@@ -20505,9 +20834,9 @@
                 <a:ea typeface="Calibri" pitchFamily="34" charset="-122"/>
                 <a:cs typeface="Calibri" pitchFamily="34" charset="-120"/>
               </a:rPr>
-              <a:t>O5 Preserve utility - met by the metric (97.1 % retention) but the baseline model is weak at sigma = 3.</a:t>
-            </a:r>
-            <a:endParaRPr lang="en-US" sz="1900" dirty="0"/>
+              <a:t>O5 Preserve utility - met: 97.1 % retention (bigram default), 99.9 % (neural, no noise), 98.5 % at sigma 0.03; 59 % at sigma 0.1 would be REVIEW_REQUIRED.</a:t>
+            </a:r>
+            <a:endParaRPr lang="en-US" sz="1600" dirty="0"/>
           </a:p>
           <a:p>
             <a:pPr marL="342900" indent="-342900">
@@ -20518,7 +20847,7 @@
               <a:buChar char="•"/>
             </a:pPr>
             <a:r>
-              <a:rPr lang="en-US" sz="1900" dirty="0">
+              <a:rPr lang="en-US" sz="1600" dirty="0">
                 <a:solidFill>
                   <a:srgbClr val="222222"/>
                 </a:solidFill>
@@ -20526,9 +20855,9 @@
                 <a:ea typeface="Calibri" pitchFamily="34" charset="-122"/>
                 <a:cs typeface="Calibri" pitchFamily="34" charset="-120"/>
               </a:rPr>
-              <a:t>O6 Auditable record per request - met with limits: tamper-evident against edits, not against forgery.</a:t>
-            </a:r>
-            <a:endParaRPr lang="en-US" sz="1900" dirty="0"/>
+              <a:t>O6 Auditable record per request - met, with 8 measured defects: forgeable chain, empty ledger verifies, one bad line breaks the UI.</a:t>
+            </a:r>
+            <a:endParaRPr lang="en-US" sz="1600" dirty="0"/>
           </a:p>
         </p:txBody>
       </p:sp>
